--- a/public/videos/repositories/cross-genre/cross-genre-tech-preview.pptx
+++ b/public/videos/repositories/cross-genre/cross-genre-tech-preview.pptx
@@ -134,7 +134,7 @@
           <p:cNvPr id="2" name="タイトル 1">
             <a:extLst>
               <a:ext uri="{FF2B5EF4-FFF2-40B4-BE49-F238E27FC236}">
-                <a16:creationId xmlns:a16="http://schemas.microsoft.com/office/drawing/2014/main" id="{B93E59D5-D7FE-4AA1-CC38-BA9C3127F052}"/>
+                <a16:creationId xmlns:a16="http://schemas.microsoft.com/office/drawing/2014/main" id="{E20F5DF9-2C61-AF98-A3B9-FA34188FB22A}"/>
               </a:ext>
             </a:extLst>
           </p:cNvPr>
@@ -171,7 +171,7 @@
           <p:cNvPr id="3" name="字幕 2">
             <a:extLst>
               <a:ext uri="{FF2B5EF4-FFF2-40B4-BE49-F238E27FC236}">
-                <a16:creationId xmlns:a16="http://schemas.microsoft.com/office/drawing/2014/main" id="{00D71079-F025-F450-85C1-F13DEB59DC3E}"/>
+                <a16:creationId xmlns:a16="http://schemas.microsoft.com/office/drawing/2014/main" id="{5F8E16FC-FE15-A602-1637-0C4BC4146BD7}"/>
               </a:ext>
             </a:extLst>
           </p:cNvPr>
@@ -241,7 +241,7 @@
           <p:cNvPr id="4" name="日付プレースホルダー 3">
             <a:extLst>
               <a:ext uri="{FF2B5EF4-FFF2-40B4-BE49-F238E27FC236}">
-                <a16:creationId xmlns:a16="http://schemas.microsoft.com/office/drawing/2014/main" id="{789EAB5C-2DFC-9DD4-D8BC-58248FA61304}"/>
+                <a16:creationId xmlns:a16="http://schemas.microsoft.com/office/drawing/2014/main" id="{1B8B97D1-BB9F-B74A-3595-C2AC9934F1AF}"/>
               </a:ext>
             </a:extLst>
           </p:cNvPr>
@@ -257,7 +257,7 @@
           <a:bodyPr/>
           <a:lstStyle/>
           <a:p>
-            <a:fld id="{3AF78D36-3E6B-41BC-B053-81BC42BFF9AC}" type="datetimeFigureOut">
+            <a:fld id="{A6D1368F-A992-4EC9-B115-511A7DEB4DC6}" type="datetimeFigureOut">
               <a:rPr kumimoji="1" lang="ja-JP" altLang="en-US" smtClean="0"/>
               <a:t>2026/7/30</a:t>
             </a:fld>
@@ -270,7 +270,7 @@
           <p:cNvPr id="5" name="フッター プレースホルダー 4">
             <a:extLst>
               <a:ext uri="{FF2B5EF4-FFF2-40B4-BE49-F238E27FC236}">
-                <a16:creationId xmlns:a16="http://schemas.microsoft.com/office/drawing/2014/main" id="{B32AA689-EDEB-777A-8027-38AAA0855108}"/>
+                <a16:creationId xmlns:a16="http://schemas.microsoft.com/office/drawing/2014/main" id="{4A01A40D-45B1-457B-1603-F845838ABD85}"/>
               </a:ext>
             </a:extLst>
           </p:cNvPr>
@@ -295,7 +295,7 @@
           <p:cNvPr id="6" name="スライド番号プレースホルダー 5">
             <a:extLst>
               <a:ext uri="{FF2B5EF4-FFF2-40B4-BE49-F238E27FC236}">
-                <a16:creationId xmlns:a16="http://schemas.microsoft.com/office/drawing/2014/main" id="{7E53A912-68C7-8E2A-451C-DF253CF96430}"/>
+                <a16:creationId xmlns:a16="http://schemas.microsoft.com/office/drawing/2014/main" id="{E3B76A05-3C26-8750-2080-CD85ACAEA5C1}"/>
               </a:ext>
             </a:extLst>
           </p:cNvPr>
@@ -311,7 +311,7 @@
           <a:bodyPr/>
           <a:lstStyle/>
           <a:p>
-            <a:fld id="{0B8B9F99-5149-41DD-AB24-BAFB1B47C3F9}" type="slidenum">
+            <a:fld id="{94860267-42AB-4F84-B253-BA3B6EFBB2FE}" type="slidenum">
               <a:rPr kumimoji="1" lang="ja-JP" altLang="en-US" smtClean="0"/>
               <a:t>‹#›</a:t>
             </a:fld>
@@ -322,7 +322,7 @@
     </p:spTree>
     <p:extLst>
       <p:ext uri="{BB962C8B-B14F-4D97-AF65-F5344CB8AC3E}">
-        <p14:creationId xmlns:p14="http://schemas.microsoft.com/office/powerpoint/2010/main" val="2467764351"/>
+        <p14:creationId xmlns:p14="http://schemas.microsoft.com/office/powerpoint/2010/main" val="1786846226"/>
       </p:ext>
     </p:extLst>
   </p:cSld>
@@ -354,7 +354,7 @@
           <p:cNvPr id="2" name="タイトル 1">
             <a:extLst>
               <a:ext uri="{FF2B5EF4-FFF2-40B4-BE49-F238E27FC236}">
-                <a16:creationId xmlns:a16="http://schemas.microsoft.com/office/drawing/2014/main" id="{015619E6-079A-49AF-8782-2FD276AB5137}"/>
+                <a16:creationId xmlns:a16="http://schemas.microsoft.com/office/drawing/2014/main" id="{2CF2B250-636B-74CF-B8C3-35239C0B5D33}"/>
               </a:ext>
             </a:extLst>
           </p:cNvPr>
@@ -382,7 +382,7 @@
           <p:cNvPr id="3" name="縦書きテキスト プレースホルダー 2">
             <a:extLst>
               <a:ext uri="{FF2B5EF4-FFF2-40B4-BE49-F238E27FC236}">
-                <a16:creationId xmlns:a16="http://schemas.microsoft.com/office/drawing/2014/main" id="{1EF833F3-E985-5310-CF48-B0FE851C17C0}"/>
+                <a16:creationId xmlns:a16="http://schemas.microsoft.com/office/drawing/2014/main" id="{42A635ED-A698-772F-889A-37E38F6390B2}"/>
               </a:ext>
             </a:extLst>
           </p:cNvPr>
@@ -471,7 +471,7 @@
           <p:cNvPr id="4" name="日付プレースホルダー 3">
             <a:extLst>
               <a:ext uri="{FF2B5EF4-FFF2-40B4-BE49-F238E27FC236}">
-                <a16:creationId xmlns:a16="http://schemas.microsoft.com/office/drawing/2014/main" id="{BCE2C22D-03DB-1C3C-0F2D-9B6EAA5EB86C}"/>
+                <a16:creationId xmlns:a16="http://schemas.microsoft.com/office/drawing/2014/main" id="{CB37FE9F-E65B-AA39-C57A-6DCE245AC2E2}"/>
               </a:ext>
             </a:extLst>
           </p:cNvPr>
@@ -487,7 +487,7 @@
           <a:bodyPr/>
           <a:lstStyle/>
           <a:p>
-            <a:fld id="{3AF78D36-3E6B-41BC-B053-81BC42BFF9AC}" type="datetimeFigureOut">
+            <a:fld id="{A6D1368F-A992-4EC9-B115-511A7DEB4DC6}" type="datetimeFigureOut">
               <a:rPr kumimoji="1" lang="ja-JP" altLang="en-US" smtClean="0"/>
               <a:t>2026/7/30</a:t>
             </a:fld>
@@ -500,7 +500,7 @@
           <p:cNvPr id="5" name="フッター プレースホルダー 4">
             <a:extLst>
               <a:ext uri="{FF2B5EF4-FFF2-40B4-BE49-F238E27FC236}">
-                <a16:creationId xmlns:a16="http://schemas.microsoft.com/office/drawing/2014/main" id="{6056A055-F038-DF3D-E7CB-2A09E54128A3}"/>
+                <a16:creationId xmlns:a16="http://schemas.microsoft.com/office/drawing/2014/main" id="{F646E921-2DB9-FA6E-58F5-16AA77BA4EBB}"/>
               </a:ext>
             </a:extLst>
           </p:cNvPr>
@@ -525,7 +525,7 @@
           <p:cNvPr id="6" name="スライド番号プレースホルダー 5">
             <a:extLst>
               <a:ext uri="{FF2B5EF4-FFF2-40B4-BE49-F238E27FC236}">
-                <a16:creationId xmlns:a16="http://schemas.microsoft.com/office/drawing/2014/main" id="{7C6C458D-8E19-81DC-02F9-955F26F7CD35}"/>
+                <a16:creationId xmlns:a16="http://schemas.microsoft.com/office/drawing/2014/main" id="{29154422-7522-2A03-F297-C96CD87511EA}"/>
               </a:ext>
             </a:extLst>
           </p:cNvPr>
@@ -541,7 +541,7 @@
           <a:bodyPr/>
           <a:lstStyle/>
           <a:p>
-            <a:fld id="{0B8B9F99-5149-41DD-AB24-BAFB1B47C3F9}" type="slidenum">
+            <a:fld id="{94860267-42AB-4F84-B253-BA3B6EFBB2FE}" type="slidenum">
               <a:rPr kumimoji="1" lang="ja-JP" altLang="en-US" smtClean="0"/>
               <a:t>‹#›</a:t>
             </a:fld>
@@ -552,7 +552,7 @@
     </p:spTree>
     <p:extLst>
       <p:ext uri="{BB962C8B-B14F-4D97-AF65-F5344CB8AC3E}">
-        <p14:creationId xmlns:p14="http://schemas.microsoft.com/office/powerpoint/2010/main" val="2783518573"/>
+        <p14:creationId xmlns:p14="http://schemas.microsoft.com/office/powerpoint/2010/main" val="3548718247"/>
       </p:ext>
     </p:extLst>
   </p:cSld>
@@ -584,7 +584,7 @@
           <p:cNvPr id="2" name="縦書きタイトル 1">
             <a:extLst>
               <a:ext uri="{FF2B5EF4-FFF2-40B4-BE49-F238E27FC236}">
-                <a16:creationId xmlns:a16="http://schemas.microsoft.com/office/drawing/2014/main" id="{8D04FA38-B27D-47B5-AC15-553EDA66F92B}"/>
+                <a16:creationId xmlns:a16="http://schemas.microsoft.com/office/drawing/2014/main" id="{41082DAA-6049-AF9E-86DA-E065A85F84AA}"/>
               </a:ext>
             </a:extLst>
           </p:cNvPr>
@@ -617,7 +617,7 @@
           <p:cNvPr id="3" name="縦書きテキスト プレースホルダー 2">
             <a:extLst>
               <a:ext uri="{FF2B5EF4-FFF2-40B4-BE49-F238E27FC236}">
-                <a16:creationId xmlns:a16="http://schemas.microsoft.com/office/drawing/2014/main" id="{C09CAC6D-9163-0F84-0E55-032C51359852}"/>
+                <a16:creationId xmlns:a16="http://schemas.microsoft.com/office/drawing/2014/main" id="{9907EC9A-9AF1-EE5B-3A1B-7CCA098561D4}"/>
               </a:ext>
             </a:extLst>
           </p:cNvPr>
@@ -711,7 +711,7 @@
           <p:cNvPr id="4" name="日付プレースホルダー 3">
             <a:extLst>
               <a:ext uri="{FF2B5EF4-FFF2-40B4-BE49-F238E27FC236}">
-                <a16:creationId xmlns:a16="http://schemas.microsoft.com/office/drawing/2014/main" id="{558FE9E4-E43F-4F11-28C1-F3D2B94F730F}"/>
+                <a16:creationId xmlns:a16="http://schemas.microsoft.com/office/drawing/2014/main" id="{862EA5FA-780A-17B7-75B0-761AC3BEF1DF}"/>
               </a:ext>
             </a:extLst>
           </p:cNvPr>
@@ -727,7 +727,7 @@
           <a:bodyPr/>
           <a:lstStyle/>
           <a:p>
-            <a:fld id="{3AF78D36-3E6B-41BC-B053-81BC42BFF9AC}" type="datetimeFigureOut">
+            <a:fld id="{A6D1368F-A992-4EC9-B115-511A7DEB4DC6}" type="datetimeFigureOut">
               <a:rPr kumimoji="1" lang="ja-JP" altLang="en-US" smtClean="0"/>
               <a:t>2026/7/30</a:t>
             </a:fld>
@@ -740,7 +740,7 @@
           <p:cNvPr id="5" name="フッター プレースホルダー 4">
             <a:extLst>
               <a:ext uri="{FF2B5EF4-FFF2-40B4-BE49-F238E27FC236}">
-                <a16:creationId xmlns:a16="http://schemas.microsoft.com/office/drawing/2014/main" id="{DF6A8642-8122-BFC6-50B2-7EC65BADADDA}"/>
+                <a16:creationId xmlns:a16="http://schemas.microsoft.com/office/drawing/2014/main" id="{7F2BBB19-1F26-5374-7B42-BD7497F5DF62}"/>
               </a:ext>
             </a:extLst>
           </p:cNvPr>
@@ -765,7 +765,7 @@
           <p:cNvPr id="6" name="スライド番号プレースホルダー 5">
             <a:extLst>
               <a:ext uri="{FF2B5EF4-FFF2-40B4-BE49-F238E27FC236}">
-                <a16:creationId xmlns:a16="http://schemas.microsoft.com/office/drawing/2014/main" id="{0E719036-F469-2E54-2535-DB59714B8D9F}"/>
+                <a16:creationId xmlns:a16="http://schemas.microsoft.com/office/drawing/2014/main" id="{3F4C46B1-4CAD-D1EC-439A-CC8FE91C9BC9}"/>
               </a:ext>
             </a:extLst>
           </p:cNvPr>
@@ -781,7 +781,7 @@
           <a:bodyPr/>
           <a:lstStyle/>
           <a:p>
-            <a:fld id="{0B8B9F99-5149-41DD-AB24-BAFB1B47C3F9}" type="slidenum">
+            <a:fld id="{94860267-42AB-4F84-B253-BA3B6EFBB2FE}" type="slidenum">
               <a:rPr kumimoji="1" lang="ja-JP" altLang="en-US" smtClean="0"/>
               <a:t>‹#›</a:t>
             </a:fld>
@@ -792,7 +792,7 @@
     </p:spTree>
     <p:extLst>
       <p:ext uri="{BB962C8B-B14F-4D97-AF65-F5344CB8AC3E}">
-        <p14:creationId xmlns:p14="http://schemas.microsoft.com/office/powerpoint/2010/main" val="694503258"/>
+        <p14:creationId xmlns:p14="http://schemas.microsoft.com/office/powerpoint/2010/main" val="3626512088"/>
       </p:ext>
     </p:extLst>
   </p:cSld>
@@ -824,7 +824,7 @@
           <p:cNvPr id="2" name="タイトル 1">
             <a:extLst>
               <a:ext uri="{FF2B5EF4-FFF2-40B4-BE49-F238E27FC236}">
-                <a16:creationId xmlns:a16="http://schemas.microsoft.com/office/drawing/2014/main" id="{88B8F446-5B0C-6F1B-744E-139A4163B11C}"/>
+                <a16:creationId xmlns:a16="http://schemas.microsoft.com/office/drawing/2014/main" id="{4B5B7AE5-199A-7E7C-9C8F-D34A722E31B0}"/>
               </a:ext>
             </a:extLst>
           </p:cNvPr>
@@ -852,7 +852,7 @@
           <p:cNvPr id="3" name="コンテンツ プレースホルダー 2">
             <a:extLst>
               <a:ext uri="{FF2B5EF4-FFF2-40B4-BE49-F238E27FC236}">
-                <a16:creationId xmlns:a16="http://schemas.microsoft.com/office/drawing/2014/main" id="{E8FCA267-BCBD-0FF4-93AB-52EE217921EF}"/>
+                <a16:creationId xmlns:a16="http://schemas.microsoft.com/office/drawing/2014/main" id="{014A0039-AAD3-CB23-7A80-8A7DCC0A59F0}"/>
               </a:ext>
             </a:extLst>
           </p:cNvPr>
@@ -941,7 +941,7 @@
           <p:cNvPr id="4" name="日付プレースホルダー 3">
             <a:extLst>
               <a:ext uri="{FF2B5EF4-FFF2-40B4-BE49-F238E27FC236}">
-                <a16:creationId xmlns:a16="http://schemas.microsoft.com/office/drawing/2014/main" id="{516A8CF0-78B6-1453-73E6-01D34D3FE004}"/>
+                <a16:creationId xmlns:a16="http://schemas.microsoft.com/office/drawing/2014/main" id="{C8973114-9FF1-04A4-50A7-FD1F59D2A5AD}"/>
               </a:ext>
             </a:extLst>
           </p:cNvPr>
@@ -957,7 +957,7 @@
           <a:bodyPr/>
           <a:lstStyle/>
           <a:p>
-            <a:fld id="{3AF78D36-3E6B-41BC-B053-81BC42BFF9AC}" type="datetimeFigureOut">
+            <a:fld id="{A6D1368F-A992-4EC9-B115-511A7DEB4DC6}" type="datetimeFigureOut">
               <a:rPr kumimoji="1" lang="ja-JP" altLang="en-US" smtClean="0"/>
               <a:t>2026/7/30</a:t>
             </a:fld>
@@ -970,7 +970,7 @@
           <p:cNvPr id="5" name="フッター プレースホルダー 4">
             <a:extLst>
               <a:ext uri="{FF2B5EF4-FFF2-40B4-BE49-F238E27FC236}">
-                <a16:creationId xmlns:a16="http://schemas.microsoft.com/office/drawing/2014/main" id="{16097631-269D-9DFA-48E6-04EF121EFDDC}"/>
+                <a16:creationId xmlns:a16="http://schemas.microsoft.com/office/drawing/2014/main" id="{5968D9C3-9B33-3264-81DF-5BD99A88BA8B}"/>
               </a:ext>
             </a:extLst>
           </p:cNvPr>
@@ -995,7 +995,7 @@
           <p:cNvPr id="6" name="スライド番号プレースホルダー 5">
             <a:extLst>
               <a:ext uri="{FF2B5EF4-FFF2-40B4-BE49-F238E27FC236}">
-                <a16:creationId xmlns:a16="http://schemas.microsoft.com/office/drawing/2014/main" id="{1B2BD559-65B4-0C31-AB3A-0ED7ECFC5C56}"/>
+                <a16:creationId xmlns:a16="http://schemas.microsoft.com/office/drawing/2014/main" id="{65CBD4C4-31A2-CE86-BFFF-0BDD66846350}"/>
               </a:ext>
             </a:extLst>
           </p:cNvPr>
@@ -1011,7 +1011,7 @@
           <a:bodyPr/>
           <a:lstStyle/>
           <a:p>
-            <a:fld id="{0B8B9F99-5149-41DD-AB24-BAFB1B47C3F9}" type="slidenum">
+            <a:fld id="{94860267-42AB-4F84-B253-BA3B6EFBB2FE}" type="slidenum">
               <a:rPr kumimoji="1" lang="ja-JP" altLang="en-US" smtClean="0"/>
               <a:t>‹#›</a:t>
             </a:fld>
@@ -1022,7 +1022,7 @@
     </p:spTree>
     <p:extLst>
       <p:ext uri="{BB962C8B-B14F-4D97-AF65-F5344CB8AC3E}">
-        <p14:creationId xmlns:p14="http://schemas.microsoft.com/office/powerpoint/2010/main" val="1633877895"/>
+        <p14:creationId xmlns:p14="http://schemas.microsoft.com/office/powerpoint/2010/main" val="1109765110"/>
       </p:ext>
     </p:extLst>
   </p:cSld>
@@ -1054,7 +1054,7 @@
           <p:cNvPr id="2" name="タイトル 1">
             <a:extLst>
               <a:ext uri="{FF2B5EF4-FFF2-40B4-BE49-F238E27FC236}">
-                <a16:creationId xmlns:a16="http://schemas.microsoft.com/office/drawing/2014/main" id="{1DA0C7EA-5771-80B0-9870-06A661E58A22}"/>
+                <a16:creationId xmlns:a16="http://schemas.microsoft.com/office/drawing/2014/main" id="{A16950B5-D702-6834-A70C-D91B4CCB2208}"/>
               </a:ext>
             </a:extLst>
           </p:cNvPr>
@@ -1091,7 +1091,7 @@
           <p:cNvPr id="3" name="テキスト プレースホルダー 2">
             <a:extLst>
               <a:ext uri="{FF2B5EF4-FFF2-40B4-BE49-F238E27FC236}">
-                <a16:creationId xmlns:a16="http://schemas.microsoft.com/office/drawing/2014/main" id="{F8B961EE-D3ED-DE48-4308-076AD12A76AB}"/>
+                <a16:creationId xmlns:a16="http://schemas.microsoft.com/office/drawing/2014/main" id="{4E6E6441-4C13-BFBA-1232-0BED599BFADF}"/>
               </a:ext>
             </a:extLst>
           </p:cNvPr>
@@ -1216,7 +1216,7 @@
           <p:cNvPr id="4" name="日付プレースホルダー 3">
             <a:extLst>
               <a:ext uri="{FF2B5EF4-FFF2-40B4-BE49-F238E27FC236}">
-                <a16:creationId xmlns:a16="http://schemas.microsoft.com/office/drawing/2014/main" id="{C58C2828-AE08-ACB1-DEC1-056656264714}"/>
+                <a16:creationId xmlns:a16="http://schemas.microsoft.com/office/drawing/2014/main" id="{F6E39DF1-3DBD-C412-8D7F-E9447D87DF67}"/>
               </a:ext>
             </a:extLst>
           </p:cNvPr>
@@ -1232,7 +1232,7 @@
           <a:bodyPr/>
           <a:lstStyle/>
           <a:p>
-            <a:fld id="{3AF78D36-3E6B-41BC-B053-81BC42BFF9AC}" type="datetimeFigureOut">
+            <a:fld id="{A6D1368F-A992-4EC9-B115-511A7DEB4DC6}" type="datetimeFigureOut">
               <a:rPr kumimoji="1" lang="ja-JP" altLang="en-US" smtClean="0"/>
               <a:t>2026/7/30</a:t>
             </a:fld>
@@ -1245,7 +1245,7 @@
           <p:cNvPr id="5" name="フッター プレースホルダー 4">
             <a:extLst>
               <a:ext uri="{FF2B5EF4-FFF2-40B4-BE49-F238E27FC236}">
-                <a16:creationId xmlns:a16="http://schemas.microsoft.com/office/drawing/2014/main" id="{7C91A1ED-0303-CDE1-0985-4372FCEAE000}"/>
+                <a16:creationId xmlns:a16="http://schemas.microsoft.com/office/drawing/2014/main" id="{E03AC652-7C66-2C70-105F-1BB6F223417D}"/>
               </a:ext>
             </a:extLst>
           </p:cNvPr>
@@ -1270,7 +1270,7 @@
           <p:cNvPr id="6" name="スライド番号プレースホルダー 5">
             <a:extLst>
               <a:ext uri="{FF2B5EF4-FFF2-40B4-BE49-F238E27FC236}">
-                <a16:creationId xmlns:a16="http://schemas.microsoft.com/office/drawing/2014/main" id="{5B2DDB94-F692-24C8-5D3F-7B56EB7F7DBA}"/>
+                <a16:creationId xmlns:a16="http://schemas.microsoft.com/office/drawing/2014/main" id="{823DD884-DA71-D556-BFBD-AFD639F448A2}"/>
               </a:ext>
             </a:extLst>
           </p:cNvPr>
@@ -1286,7 +1286,7 @@
           <a:bodyPr/>
           <a:lstStyle/>
           <a:p>
-            <a:fld id="{0B8B9F99-5149-41DD-AB24-BAFB1B47C3F9}" type="slidenum">
+            <a:fld id="{94860267-42AB-4F84-B253-BA3B6EFBB2FE}" type="slidenum">
               <a:rPr kumimoji="1" lang="ja-JP" altLang="en-US" smtClean="0"/>
               <a:t>‹#›</a:t>
             </a:fld>
@@ -1297,7 +1297,7 @@
     </p:spTree>
     <p:extLst>
       <p:ext uri="{BB962C8B-B14F-4D97-AF65-F5344CB8AC3E}">
-        <p14:creationId xmlns:p14="http://schemas.microsoft.com/office/powerpoint/2010/main" val="1233814984"/>
+        <p14:creationId xmlns:p14="http://schemas.microsoft.com/office/powerpoint/2010/main" val="4080733846"/>
       </p:ext>
     </p:extLst>
   </p:cSld>
@@ -1329,7 +1329,7 @@
           <p:cNvPr id="2" name="タイトル 1">
             <a:extLst>
               <a:ext uri="{FF2B5EF4-FFF2-40B4-BE49-F238E27FC236}">
-                <a16:creationId xmlns:a16="http://schemas.microsoft.com/office/drawing/2014/main" id="{33DB5ECD-0AB6-8798-9AFC-F8AF2A49E11D}"/>
+                <a16:creationId xmlns:a16="http://schemas.microsoft.com/office/drawing/2014/main" id="{2AEFBFE2-DDEA-A246-B801-F8C742125413}"/>
               </a:ext>
             </a:extLst>
           </p:cNvPr>
@@ -1357,7 +1357,7 @@
           <p:cNvPr id="3" name="コンテンツ プレースホルダー 2">
             <a:extLst>
               <a:ext uri="{FF2B5EF4-FFF2-40B4-BE49-F238E27FC236}">
-                <a16:creationId xmlns:a16="http://schemas.microsoft.com/office/drawing/2014/main" id="{184A9AA3-8A3F-E57C-30FD-6BD56F5A2207}"/>
+                <a16:creationId xmlns:a16="http://schemas.microsoft.com/office/drawing/2014/main" id="{CEC23231-D284-6AE9-8B9F-D40655747F47}"/>
               </a:ext>
             </a:extLst>
           </p:cNvPr>
@@ -1451,7 +1451,7 @@
           <p:cNvPr id="4" name="コンテンツ プレースホルダー 3">
             <a:extLst>
               <a:ext uri="{FF2B5EF4-FFF2-40B4-BE49-F238E27FC236}">
-                <a16:creationId xmlns:a16="http://schemas.microsoft.com/office/drawing/2014/main" id="{98083BD4-14EE-A7CF-BA0B-6A5F7EFDA80B}"/>
+                <a16:creationId xmlns:a16="http://schemas.microsoft.com/office/drawing/2014/main" id="{E432A67E-DD5F-00B1-8308-A4610CA4B8C2}"/>
               </a:ext>
             </a:extLst>
           </p:cNvPr>
@@ -1545,7 +1545,7 @@
           <p:cNvPr id="5" name="日付プレースホルダー 4">
             <a:extLst>
               <a:ext uri="{FF2B5EF4-FFF2-40B4-BE49-F238E27FC236}">
-                <a16:creationId xmlns:a16="http://schemas.microsoft.com/office/drawing/2014/main" id="{F7F09B1A-F8FD-F228-7878-20CA19BCD008}"/>
+                <a16:creationId xmlns:a16="http://schemas.microsoft.com/office/drawing/2014/main" id="{011189E1-17B5-6E9E-7F1E-0FC47EDE8AB4}"/>
               </a:ext>
             </a:extLst>
           </p:cNvPr>
@@ -1561,7 +1561,7 @@
           <a:bodyPr/>
           <a:lstStyle/>
           <a:p>
-            <a:fld id="{3AF78D36-3E6B-41BC-B053-81BC42BFF9AC}" type="datetimeFigureOut">
+            <a:fld id="{A6D1368F-A992-4EC9-B115-511A7DEB4DC6}" type="datetimeFigureOut">
               <a:rPr kumimoji="1" lang="ja-JP" altLang="en-US" smtClean="0"/>
               <a:t>2026/7/30</a:t>
             </a:fld>
@@ -1574,7 +1574,7 @@
           <p:cNvPr id="6" name="フッター プレースホルダー 5">
             <a:extLst>
               <a:ext uri="{FF2B5EF4-FFF2-40B4-BE49-F238E27FC236}">
-                <a16:creationId xmlns:a16="http://schemas.microsoft.com/office/drawing/2014/main" id="{3B7F23C3-3C6F-EE2B-68A2-C75B500C0A5F}"/>
+                <a16:creationId xmlns:a16="http://schemas.microsoft.com/office/drawing/2014/main" id="{9ECA3161-518F-2E4A-E182-0BCA595CDB02}"/>
               </a:ext>
             </a:extLst>
           </p:cNvPr>
@@ -1599,7 +1599,7 @@
           <p:cNvPr id="7" name="スライド番号プレースホルダー 6">
             <a:extLst>
               <a:ext uri="{FF2B5EF4-FFF2-40B4-BE49-F238E27FC236}">
-                <a16:creationId xmlns:a16="http://schemas.microsoft.com/office/drawing/2014/main" id="{9DD369A4-9652-504F-2D01-F2FC28507B9C}"/>
+                <a16:creationId xmlns:a16="http://schemas.microsoft.com/office/drawing/2014/main" id="{C333841A-7BD0-C8E6-AB53-75F2495DDA9C}"/>
               </a:ext>
             </a:extLst>
           </p:cNvPr>
@@ -1615,7 +1615,7 @@
           <a:bodyPr/>
           <a:lstStyle/>
           <a:p>
-            <a:fld id="{0B8B9F99-5149-41DD-AB24-BAFB1B47C3F9}" type="slidenum">
+            <a:fld id="{94860267-42AB-4F84-B253-BA3B6EFBB2FE}" type="slidenum">
               <a:rPr kumimoji="1" lang="ja-JP" altLang="en-US" smtClean="0"/>
               <a:t>‹#›</a:t>
             </a:fld>
@@ -1626,7 +1626,7 @@
     </p:spTree>
     <p:extLst>
       <p:ext uri="{BB962C8B-B14F-4D97-AF65-F5344CB8AC3E}">
-        <p14:creationId xmlns:p14="http://schemas.microsoft.com/office/powerpoint/2010/main" val="2575653507"/>
+        <p14:creationId xmlns:p14="http://schemas.microsoft.com/office/powerpoint/2010/main" val="3357502159"/>
       </p:ext>
     </p:extLst>
   </p:cSld>
@@ -1658,7 +1658,7 @@
           <p:cNvPr id="2" name="タイトル 1">
             <a:extLst>
               <a:ext uri="{FF2B5EF4-FFF2-40B4-BE49-F238E27FC236}">
-                <a16:creationId xmlns:a16="http://schemas.microsoft.com/office/drawing/2014/main" id="{32915579-134A-A8B2-7E33-11431B424D60}"/>
+                <a16:creationId xmlns:a16="http://schemas.microsoft.com/office/drawing/2014/main" id="{3E5E2B6C-13AC-D375-DDD0-00E817E9A1CC}"/>
               </a:ext>
             </a:extLst>
           </p:cNvPr>
@@ -1691,7 +1691,7 @@
           <p:cNvPr id="3" name="テキスト プレースホルダー 2">
             <a:extLst>
               <a:ext uri="{FF2B5EF4-FFF2-40B4-BE49-F238E27FC236}">
-                <a16:creationId xmlns:a16="http://schemas.microsoft.com/office/drawing/2014/main" id="{F3D5299E-D055-7338-C6A5-CF7FA31D07CF}"/>
+                <a16:creationId xmlns:a16="http://schemas.microsoft.com/office/drawing/2014/main" id="{6DA6E3EA-F3A7-6230-5654-A2F7EDB50250}"/>
               </a:ext>
             </a:extLst>
           </p:cNvPr>
@@ -1762,7 +1762,7 @@
           <p:cNvPr id="4" name="コンテンツ プレースホルダー 3">
             <a:extLst>
               <a:ext uri="{FF2B5EF4-FFF2-40B4-BE49-F238E27FC236}">
-                <a16:creationId xmlns:a16="http://schemas.microsoft.com/office/drawing/2014/main" id="{BC617432-9BE7-5C05-8527-79A4E4AC4F50}"/>
+                <a16:creationId xmlns:a16="http://schemas.microsoft.com/office/drawing/2014/main" id="{C38D997F-39BE-BDD6-FC43-D00206AEFC4D}"/>
               </a:ext>
             </a:extLst>
           </p:cNvPr>
@@ -1856,7 +1856,7 @@
           <p:cNvPr id="5" name="テキスト プレースホルダー 4">
             <a:extLst>
               <a:ext uri="{FF2B5EF4-FFF2-40B4-BE49-F238E27FC236}">
-                <a16:creationId xmlns:a16="http://schemas.microsoft.com/office/drawing/2014/main" id="{658964D4-C998-A3E0-4C25-0271B6C560F6}"/>
+                <a16:creationId xmlns:a16="http://schemas.microsoft.com/office/drawing/2014/main" id="{A92919DC-6234-0F3A-630B-A2DD55B29AD8}"/>
               </a:ext>
             </a:extLst>
           </p:cNvPr>
@@ -1927,7 +1927,7 @@
           <p:cNvPr id="6" name="コンテンツ プレースホルダー 5">
             <a:extLst>
               <a:ext uri="{FF2B5EF4-FFF2-40B4-BE49-F238E27FC236}">
-                <a16:creationId xmlns:a16="http://schemas.microsoft.com/office/drawing/2014/main" id="{216CF26D-0193-962A-5FB1-240A42BA3373}"/>
+                <a16:creationId xmlns:a16="http://schemas.microsoft.com/office/drawing/2014/main" id="{5D1841CC-7F2A-4C7C-3D74-64D68809B8CC}"/>
               </a:ext>
             </a:extLst>
           </p:cNvPr>
@@ -2021,7 +2021,7 @@
           <p:cNvPr id="7" name="日付プレースホルダー 6">
             <a:extLst>
               <a:ext uri="{FF2B5EF4-FFF2-40B4-BE49-F238E27FC236}">
-                <a16:creationId xmlns:a16="http://schemas.microsoft.com/office/drawing/2014/main" id="{5B02B264-2F3F-FBCC-ACA4-735349900152}"/>
+                <a16:creationId xmlns:a16="http://schemas.microsoft.com/office/drawing/2014/main" id="{F23BBC71-B81E-64F4-AE6E-8FAEA29F8A07}"/>
               </a:ext>
             </a:extLst>
           </p:cNvPr>
@@ -2037,7 +2037,7 @@
           <a:bodyPr/>
           <a:lstStyle/>
           <a:p>
-            <a:fld id="{3AF78D36-3E6B-41BC-B053-81BC42BFF9AC}" type="datetimeFigureOut">
+            <a:fld id="{A6D1368F-A992-4EC9-B115-511A7DEB4DC6}" type="datetimeFigureOut">
               <a:rPr kumimoji="1" lang="ja-JP" altLang="en-US" smtClean="0"/>
               <a:t>2026/7/30</a:t>
             </a:fld>
@@ -2050,7 +2050,7 @@
           <p:cNvPr id="8" name="フッター プレースホルダー 7">
             <a:extLst>
               <a:ext uri="{FF2B5EF4-FFF2-40B4-BE49-F238E27FC236}">
-                <a16:creationId xmlns:a16="http://schemas.microsoft.com/office/drawing/2014/main" id="{FAEADF30-9B8A-6B52-CE02-CD30D0C7DEE0}"/>
+                <a16:creationId xmlns:a16="http://schemas.microsoft.com/office/drawing/2014/main" id="{911052EE-8851-D6E9-00A8-D05E6FEB31AB}"/>
               </a:ext>
             </a:extLst>
           </p:cNvPr>
@@ -2075,7 +2075,7 @@
           <p:cNvPr id="9" name="スライド番号プレースホルダー 8">
             <a:extLst>
               <a:ext uri="{FF2B5EF4-FFF2-40B4-BE49-F238E27FC236}">
-                <a16:creationId xmlns:a16="http://schemas.microsoft.com/office/drawing/2014/main" id="{2373F459-E0BA-3917-B036-456CFA2EBB76}"/>
+                <a16:creationId xmlns:a16="http://schemas.microsoft.com/office/drawing/2014/main" id="{4A12F32F-EF9C-040D-A1A0-1354E4551E0B}"/>
               </a:ext>
             </a:extLst>
           </p:cNvPr>
@@ -2091,7 +2091,7 @@
           <a:bodyPr/>
           <a:lstStyle/>
           <a:p>
-            <a:fld id="{0B8B9F99-5149-41DD-AB24-BAFB1B47C3F9}" type="slidenum">
+            <a:fld id="{94860267-42AB-4F84-B253-BA3B6EFBB2FE}" type="slidenum">
               <a:rPr kumimoji="1" lang="ja-JP" altLang="en-US" smtClean="0"/>
               <a:t>‹#›</a:t>
             </a:fld>
@@ -2102,7 +2102,7 @@
     </p:spTree>
     <p:extLst>
       <p:ext uri="{BB962C8B-B14F-4D97-AF65-F5344CB8AC3E}">
-        <p14:creationId xmlns:p14="http://schemas.microsoft.com/office/powerpoint/2010/main" val="1449033360"/>
+        <p14:creationId xmlns:p14="http://schemas.microsoft.com/office/powerpoint/2010/main" val="113445458"/>
       </p:ext>
     </p:extLst>
   </p:cSld>
@@ -2134,7 +2134,7 @@
           <p:cNvPr id="2" name="タイトル 1">
             <a:extLst>
               <a:ext uri="{FF2B5EF4-FFF2-40B4-BE49-F238E27FC236}">
-                <a16:creationId xmlns:a16="http://schemas.microsoft.com/office/drawing/2014/main" id="{16C81D99-AF64-22C4-D307-921123963B34}"/>
+                <a16:creationId xmlns:a16="http://schemas.microsoft.com/office/drawing/2014/main" id="{1BBD62CD-1E55-A869-A94E-3CD4DF33726D}"/>
               </a:ext>
             </a:extLst>
           </p:cNvPr>
@@ -2162,7 +2162,7 @@
           <p:cNvPr id="3" name="日付プレースホルダー 2">
             <a:extLst>
               <a:ext uri="{FF2B5EF4-FFF2-40B4-BE49-F238E27FC236}">
-                <a16:creationId xmlns:a16="http://schemas.microsoft.com/office/drawing/2014/main" id="{975A8139-0C84-E071-3F4D-F96FBCCA19D0}"/>
+                <a16:creationId xmlns:a16="http://schemas.microsoft.com/office/drawing/2014/main" id="{EC30073E-9E82-96A4-F255-E52B31CB6882}"/>
               </a:ext>
             </a:extLst>
           </p:cNvPr>
@@ -2178,7 +2178,7 @@
           <a:bodyPr/>
           <a:lstStyle/>
           <a:p>
-            <a:fld id="{3AF78D36-3E6B-41BC-B053-81BC42BFF9AC}" type="datetimeFigureOut">
+            <a:fld id="{A6D1368F-A992-4EC9-B115-511A7DEB4DC6}" type="datetimeFigureOut">
               <a:rPr kumimoji="1" lang="ja-JP" altLang="en-US" smtClean="0"/>
               <a:t>2026/7/30</a:t>
             </a:fld>
@@ -2191,7 +2191,7 @@
           <p:cNvPr id="4" name="フッター プレースホルダー 3">
             <a:extLst>
               <a:ext uri="{FF2B5EF4-FFF2-40B4-BE49-F238E27FC236}">
-                <a16:creationId xmlns:a16="http://schemas.microsoft.com/office/drawing/2014/main" id="{A9F30A20-F0A2-187C-5ACD-95DF66F0AF91}"/>
+                <a16:creationId xmlns:a16="http://schemas.microsoft.com/office/drawing/2014/main" id="{53BFA397-5C38-FFC9-24B2-0428AA6D8A83}"/>
               </a:ext>
             </a:extLst>
           </p:cNvPr>
@@ -2216,7 +2216,7 @@
           <p:cNvPr id="5" name="スライド番号プレースホルダー 4">
             <a:extLst>
               <a:ext uri="{FF2B5EF4-FFF2-40B4-BE49-F238E27FC236}">
-                <a16:creationId xmlns:a16="http://schemas.microsoft.com/office/drawing/2014/main" id="{A9B95109-BDEA-06D0-2707-470F30367692}"/>
+                <a16:creationId xmlns:a16="http://schemas.microsoft.com/office/drawing/2014/main" id="{FC6EFEF7-6AC7-2D40-519E-5CB593F6005F}"/>
               </a:ext>
             </a:extLst>
           </p:cNvPr>
@@ -2232,7 +2232,7 @@
           <a:bodyPr/>
           <a:lstStyle/>
           <a:p>
-            <a:fld id="{0B8B9F99-5149-41DD-AB24-BAFB1B47C3F9}" type="slidenum">
+            <a:fld id="{94860267-42AB-4F84-B253-BA3B6EFBB2FE}" type="slidenum">
               <a:rPr kumimoji="1" lang="ja-JP" altLang="en-US" smtClean="0"/>
               <a:t>‹#›</a:t>
             </a:fld>
@@ -2243,7 +2243,7 @@
     </p:spTree>
     <p:extLst>
       <p:ext uri="{BB962C8B-B14F-4D97-AF65-F5344CB8AC3E}">
-        <p14:creationId xmlns:p14="http://schemas.microsoft.com/office/powerpoint/2010/main" val="3476166066"/>
+        <p14:creationId xmlns:p14="http://schemas.microsoft.com/office/powerpoint/2010/main" val="1889316039"/>
       </p:ext>
     </p:extLst>
   </p:cSld>
@@ -2275,7 +2275,7 @@
           <p:cNvPr id="2" name="日付プレースホルダー 1">
             <a:extLst>
               <a:ext uri="{FF2B5EF4-FFF2-40B4-BE49-F238E27FC236}">
-                <a16:creationId xmlns:a16="http://schemas.microsoft.com/office/drawing/2014/main" id="{0BE37267-9D75-F75E-A551-08E5AB2EB322}"/>
+                <a16:creationId xmlns:a16="http://schemas.microsoft.com/office/drawing/2014/main" id="{E147423A-E068-3BC9-345C-4CA5D1BEC3C6}"/>
               </a:ext>
             </a:extLst>
           </p:cNvPr>
@@ -2291,7 +2291,7 @@
           <a:bodyPr/>
           <a:lstStyle/>
           <a:p>
-            <a:fld id="{3AF78D36-3E6B-41BC-B053-81BC42BFF9AC}" type="datetimeFigureOut">
+            <a:fld id="{A6D1368F-A992-4EC9-B115-511A7DEB4DC6}" type="datetimeFigureOut">
               <a:rPr kumimoji="1" lang="ja-JP" altLang="en-US" smtClean="0"/>
               <a:t>2026/7/30</a:t>
             </a:fld>
@@ -2304,7 +2304,7 @@
           <p:cNvPr id="3" name="フッター プレースホルダー 2">
             <a:extLst>
               <a:ext uri="{FF2B5EF4-FFF2-40B4-BE49-F238E27FC236}">
-                <a16:creationId xmlns:a16="http://schemas.microsoft.com/office/drawing/2014/main" id="{75C3FBB9-2C2E-CAF5-CB49-9C6A9AFAD956}"/>
+                <a16:creationId xmlns:a16="http://schemas.microsoft.com/office/drawing/2014/main" id="{C62A0D8C-7FAD-8F57-30A0-9739FDC31985}"/>
               </a:ext>
             </a:extLst>
           </p:cNvPr>
@@ -2329,7 +2329,7 @@
           <p:cNvPr id="4" name="スライド番号プレースホルダー 3">
             <a:extLst>
               <a:ext uri="{FF2B5EF4-FFF2-40B4-BE49-F238E27FC236}">
-                <a16:creationId xmlns:a16="http://schemas.microsoft.com/office/drawing/2014/main" id="{2CBDC8EC-9714-4B89-6292-B010591A0735}"/>
+                <a16:creationId xmlns:a16="http://schemas.microsoft.com/office/drawing/2014/main" id="{DDA224EE-5649-CB1B-A9DB-41A5E9CE61EB}"/>
               </a:ext>
             </a:extLst>
           </p:cNvPr>
@@ -2345,7 +2345,7 @@
           <a:bodyPr/>
           <a:lstStyle/>
           <a:p>
-            <a:fld id="{0B8B9F99-5149-41DD-AB24-BAFB1B47C3F9}" type="slidenum">
+            <a:fld id="{94860267-42AB-4F84-B253-BA3B6EFBB2FE}" type="slidenum">
               <a:rPr kumimoji="1" lang="ja-JP" altLang="en-US" smtClean="0"/>
               <a:t>‹#›</a:t>
             </a:fld>
@@ -2356,7 +2356,7 @@
     </p:spTree>
     <p:extLst>
       <p:ext uri="{BB962C8B-B14F-4D97-AF65-F5344CB8AC3E}">
-        <p14:creationId xmlns:p14="http://schemas.microsoft.com/office/powerpoint/2010/main" val="3696778495"/>
+        <p14:creationId xmlns:p14="http://schemas.microsoft.com/office/powerpoint/2010/main" val="4026337071"/>
       </p:ext>
     </p:extLst>
   </p:cSld>
@@ -2388,7 +2388,7 @@
           <p:cNvPr id="2" name="タイトル 1">
             <a:extLst>
               <a:ext uri="{FF2B5EF4-FFF2-40B4-BE49-F238E27FC236}">
-                <a16:creationId xmlns:a16="http://schemas.microsoft.com/office/drawing/2014/main" id="{56521A33-1403-C869-A627-2DDA32C61BBD}"/>
+                <a16:creationId xmlns:a16="http://schemas.microsoft.com/office/drawing/2014/main" id="{B635B39A-3F28-4CB8-373B-86C0199956DF}"/>
               </a:ext>
             </a:extLst>
           </p:cNvPr>
@@ -2425,7 +2425,7 @@
           <p:cNvPr id="3" name="コンテンツ プレースホルダー 2">
             <a:extLst>
               <a:ext uri="{FF2B5EF4-FFF2-40B4-BE49-F238E27FC236}">
-                <a16:creationId xmlns:a16="http://schemas.microsoft.com/office/drawing/2014/main" id="{5B566DA0-171F-8E65-FF97-A62FB32BFDBB}"/>
+                <a16:creationId xmlns:a16="http://schemas.microsoft.com/office/drawing/2014/main" id="{0C9193F5-9143-849F-0811-9573F2A5FDF6}"/>
               </a:ext>
             </a:extLst>
           </p:cNvPr>
@@ -2547,7 +2547,7 @@
           <p:cNvPr id="4" name="テキスト プレースホルダー 3">
             <a:extLst>
               <a:ext uri="{FF2B5EF4-FFF2-40B4-BE49-F238E27FC236}">
-                <a16:creationId xmlns:a16="http://schemas.microsoft.com/office/drawing/2014/main" id="{F60DE873-0EB7-2711-E088-FE63BE878113}"/>
+                <a16:creationId xmlns:a16="http://schemas.microsoft.com/office/drawing/2014/main" id="{4DADCEAD-8D55-F4DB-35C7-8B5147D9477E}"/>
               </a:ext>
             </a:extLst>
           </p:cNvPr>
@@ -2618,7 +2618,7 @@
           <p:cNvPr id="5" name="日付プレースホルダー 4">
             <a:extLst>
               <a:ext uri="{FF2B5EF4-FFF2-40B4-BE49-F238E27FC236}">
-                <a16:creationId xmlns:a16="http://schemas.microsoft.com/office/drawing/2014/main" id="{A066E779-EC71-4937-F939-AA13CD74B224}"/>
+                <a16:creationId xmlns:a16="http://schemas.microsoft.com/office/drawing/2014/main" id="{74AE2519-3AF1-7589-C5D7-021E917B4A7E}"/>
               </a:ext>
             </a:extLst>
           </p:cNvPr>
@@ -2634,7 +2634,7 @@
           <a:bodyPr/>
           <a:lstStyle/>
           <a:p>
-            <a:fld id="{3AF78D36-3E6B-41BC-B053-81BC42BFF9AC}" type="datetimeFigureOut">
+            <a:fld id="{A6D1368F-A992-4EC9-B115-511A7DEB4DC6}" type="datetimeFigureOut">
               <a:rPr kumimoji="1" lang="ja-JP" altLang="en-US" smtClean="0"/>
               <a:t>2026/7/30</a:t>
             </a:fld>
@@ -2647,7 +2647,7 @@
           <p:cNvPr id="6" name="フッター プレースホルダー 5">
             <a:extLst>
               <a:ext uri="{FF2B5EF4-FFF2-40B4-BE49-F238E27FC236}">
-                <a16:creationId xmlns:a16="http://schemas.microsoft.com/office/drawing/2014/main" id="{0D80DAE3-8B19-0580-2EC7-2D95C7605AAD}"/>
+                <a16:creationId xmlns:a16="http://schemas.microsoft.com/office/drawing/2014/main" id="{F0600607-F582-DEE9-D38F-846487B4F8F0}"/>
               </a:ext>
             </a:extLst>
           </p:cNvPr>
@@ -2672,7 +2672,7 @@
           <p:cNvPr id="7" name="スライド番号プレースホルダー 6">
             <a:extLst>
               <a:ext uri="{FF2B5EF4-FFF2-40B4-BE49-F238E27FC236}">
-                <a16:creationId xmlns:a16="http://schemas.microsoft.com/office/drawing/2014/main" id="{C2EB6B38-CA08-3CA4-02B6-C68DCC334A44}"/>
+                <a16:creationId xmlns:a16="http://schemas.microsoft.com/office/drawing/2014/main" id="{87BC4B5A-A523-5BDD-8753-F022FAFAF84D}"/>
               </a:ext>
             </a:extLst>
           </p:cNvPr>
@@ -2688,7 +2688,7 @@
           <a:bodyPr/>
           <a:lstStyle/>
           <a:p>
-            <a:fld id="{0B8B9F99-5149-41DD-AB24-BAFB1B47C3F9}" type="slidenum">
+            <a:fld id="{94860267-42AB-4F84-B253-BA3B6EFBB2FE}" type="slidenum">
               <a:rPr kumimoji="1" lang="ja-JP" altLang="en-US" smtClean="0"/>
               <a:t>‹#›</a:t>
             </a:fld>
@@ -2699,7 +2699,7 @@
     </p:spTree>
     <p:extLst>
       <p:ext uri="{BB962C8B-B14F-4D97-AF65-F5344CB8AC3E}">
-        <p14:creationId xmlns:p14="http://schemas.microsoft.com/office/powerpoint/2010/main" val="1363770545"/>
+        <p14:creationId xmlns:p14="http://schemas.microsoft.com/office/powerpoint/2010/main" val="1948886242"/>
       </p:ext>
     </p:extLst>
   </p:cSld>
@@ -2731,7 +2731,7 @@
           <p:cNvPr id="2" name="タイトル 1">
             <a:extLst>
               <a:ext uri="{FF2B5EF4-FFF2-40B4-BE49-F238E27FC236}">
-                <a16:creationId xmlns:a16="http://schemas.microsoft.com/office/drawing/2014/main" id="{7C0B87B1-4C4F-7784-515D-D63940F995BC}"/>
+                <a16:creationId xmlns:a16="http://schemas.microsoft.com/office/drawing/2014/main" id="{FDA8E02B-D9B5-8923-BD58-FC4CF9267EEE}"/>
               </a:ext>
             </a:extLst>
           </p:cNvPr>
@@ -2768,7 +2768,7 @@
           <p:cNvPr id="3" name="図プレースホルダー 2">
             <a:extLst>
               <a:ext uri="{FF2B5EF4-FFF2-40B4-BE49-F238E27FC236}">
-                <a16:creationId xmlns:a16="http://schemas.microsoft.com/office/drawing/2014/main" id="{C86FFC45-4B18-88A4-431E-8AE6656E11C5}"/>
+                <a16:creationId xmlns:a16="http://schemas.microsoft.com/office/drawing/2014/main" id="{5B620491-6E92-8BA1-C779-017F96B623D9}"/>
               </a:ext>
             </a:extLst>
           </p:cNvPr>
@@ -2835,7 +2835,7 @@
           <p:cNvPr id="4" name="テキスト プレースホルダー 3">
             <a:extLst>
               <a:ext uri="{FF2B5EF4-FFF2-40B4-BE49-F238E27FC236}">
-                <a16:creationId xmlns:a16="http://schemas.microsoft.com/office/drawing/2014/main" id="{147C0FC8-15E9-DE53-0495-07AEDB70A0D9}"/>
+                <a16:creationId xmlns:a16="http://schemas.microsoft.com/office/drawing/2014/main" id="{8065B388-6B6E-7A85-7356-CC94843B57BE}"/>
               </a:ext>
             </a:extLst>
           </p:cNvPr>
@@ -2906,7 +2906,7 @@
           <p:cNvPr id="5" name="日付プレースホルダー 4">
             <a:extLst>
               <a:ext uri="{FF2B5EF4-FFF2-40B4-BE49-F238E27FC236}">
-                <a16:creationId xmlns:a16="http://schemas.microsoft.com/office/drawing/2014/main" id="{AF46D640-6CBC-80EA-134F-10EFC104DEB6}"/>
+                <a16:creationId xmlns:a16="http://schemas.microsoft.com/office/drawing/2014/main" id="{03DC4103-6A0D-ECEA-30A5-2E2F03961F5F}"/>
               </a:ext>
             </a:extLst>
           </p:cNvPr>
@@ -2922,7 +2922,7 @@
           <a:bodyPr/>
           <a:lstStyle/>
           <a:p>
-            <a:fld id="{3AF78D36-3E6B-41BC-B053-81BC42BFF9AC}" type="datetimeFigureOut">
+            <a:fld id="{A6D1368F-A992-4EC9-B115-511A7DEB4DC6}" type="datetimeFigureOut">
               <a:rPr kumimoji="1" lang="ja-JP" altLang="en-US" smtClean="0"/>
               <a:t>2026/7/30</a:t>
             </a:fld>
@@ -2935,7 +2935,7 @@
           <p:cNvPr id="6" name="フッター プレースホルダー 5">
             <a:extLst>
               <a:ext uri="{FF2B5EF4-FFF2-40B4-BE49-F238E27FC236}">
-                <a16:creationId xmlns:a16="http://schemas.microsoft.com/office/drawing/2014/main" id="{E5F11872-B685-1B30-2BF7-A256771DABD5}"/>
+                <a16:creationId xmlns:a16="http://schemas.microsoft.com/office/drawing/2014/main" id="{FA48CABB-A811-7360-61C1-ED5310DC9AA2}"/>
               </a:ext>
             </a:extLst>
           </p:cNvPr>
@@ -2960,7 +2960,7 @@
           <p:cNvPr id="7" name="スライド番号プレースホルダー 6">
             <a:extLst>
               <a:ext uri="{FF2B5EF4-FFF2-40B4-BE49-F238E27FC236}">
-                <a16:creationId xmlns:a16="http://schemas.microsoft.com/office/drawing/2014/main" id="{01F204D4-22A8-DF43-0D67-E058FD504DD0}"/>
+                <a16:creationId xmlns:a16="http://schemas.microsoft.com/office/drawing/2014/main" id="{00B70EC2-0D67-8465-E451-7B51DCFDF07D}"/>
               </a:ext>
             </a:extLst>
           </p:cNvPr>
@@ -2976,7 +2976,7 @@
           <a:bodyPr/>
           <a:lstStyle/>
           <a:p>
-            <a:fld id="{0B8B9F99-5149-41DD-AB24-BAFB1B47C3F9}" type="slidenum">
+            <a:fld id="{94860267-42AB-4F84-B253-BA3B6EFBB2FE}" type="slidenum">
               <a:rPr kumimoji="1" lang="ja-JP" altLang="en-US" smtClean="0"/>
               <a:t>‹#›</a:t>
             </a:fld>
@@ -2987,7 +2987,7 @@
     </p:spTree>
     <p:extLst>
       <p:ext uri="{BB962C8B-B14F-4D97-AF65-F5344CB8AC3E}">
-        <p14:creationId xmlns:p14="http://schemas.microsoft.com/office/powerpoint/2010/main" val="3616806276"/>
+        <p14:creationId xmlns:p14="http://schemas.microsoft.com/office/powerpoint/2010/main" val="1029731396"/>
       </p:ext>
     </p:extLst>
   </p:cSld>
@@ -3024,7 +3024,7 @@
           <p:cNvPr id="2" name="タイトル プレースホルダー 1">
             <a:extLst>
               <a:ext uri="{FF2B5EF4-FFF2-40B4-BE49-F238E27FC236}">
-                <a16:creationId xmlns:a16="http://schemas.microsoft.com/office/drawing/2014/main" id="{AB092A30-C7AD-0FE4-71CE-40192482C781}"/>
+                <a16:creationId xmlns:a16="http://schemas.microsoft.com/office/drawing/2014/main" id="{8B7342D3-F04B-6946-FE9A-A3DAFD3DD9AF}"/>
               </a:ext>
             </a:extLst>
           </p:cNvPr>
@@ -3062,7 +3062,7 @@
           <p:cNvPr id="3" name="テキスト プレースホルダー 2">
             <a:extLst>
               <a:ext uri="{FF2B5EF4-FFF2-40B4-BE49-F238E27FC236}">
-                <a16:creationId xmlns:a16="http://schemas.microsoft.com/office/drawing/2014/main" id="{7B0B6DBC-E5C6-FFE6-6E35-0B0ED2BF7328}"/>
+                <a16:creationId xmlns:a16="http://schemas.microsoft.com/office/drawing/2014/main" id="{76BC9741-FABF-9590-79BF-C5FEA1AAB436}"/>
               </a:ext>
             </a:extLst>
           </p:cNvPr>
@@ -3161,7 +3161,7 @@
           <p:cNvPr id="4" name="日付プレースホルダー 3">
             <a:extLst>
               <a:ext uri="{FF2B5EF4-FFF2-40B4-BE49-F238E27FC236}">
-                <a16:creationId xmlns:a16="http://schemas.microsoft.com/office/drawing/2014/main" id="{1BEE15CF-8DAB-4D7F-BA58-B37A42DF1596}"/>
+                <a16:creationId xmlns:a16="http://schemas.microsoft.com/office/drawing/2014/main" id="{BE61DAEE-A397-7835-4296-846AD7798AC1}"/>
               </a:ext>
             </a:extLst>
           </p:cNvPr>
@@ -3195,7 +3195,7 @@
             </a:lvl1pPr>
           </a:lstStyle>
           <a:p>
-            <a:fld id="{3AF78D36-3E6B-41BC-B053-81BC42BFF9AC}" type="datetimeFigureOut">
+            <a:fld id="{A6D1368F-A992-4EC9-B115-511A7DEB4DC6}" type="datetimeFigureOut">
               <a:rPr kumimoji="1" lang="ja-JP" altLang="en-US" smtClean="0"/>
               <a:t>2026/7/30</a:t>
             </a:fld>
@@ -3208,7 +3208,7 @@
           <p:cNvPr id="5" name="フッター プレースホルダー 4">
             <a:extLst>
               <a:ext uri="{FF2B5EF4-FFF2-40B4-BE49-F238E27FC236}">
-                <a16:creationId xmlns:a16="http://schemas.microsoft.com/office/drawing/2014/main" id="{60551364-F3D5-D195-A584-9E84BD498B83}"/>
+                <a16:creationId xmlns:a16="http://schemas.microsoft.com/office/drawing/2014/main" id="{781ED74C-5D4C-9858-DC74-6A3DCBE1F46A}"/>
               </a:ext>
             </a:extLst>
           </p:cNvPr>
@@ -3251,7 +3251,7 @@
           <p:cNvPr id="6" name="スライド番号プレースホルダー 5">
             <a:extLst>
               <a:ext uri="{FF2B5EF4-FFF2-40B4-BE49-F238E27FC236}">
-                <a16:creationId xmlns:a16="http://schemas.microsoft.com/office/drawing/2014/main" id="{F1609175-CD2B-7C00-C4E6-B6969ABA041D}"/>
+                <a16:creationId xmlns:a16="http://schemas.microsoft.com/office/drawing/2014/main" id="{9F30B5F8-65F7-0497-4772-98313B74F6D1}"/>
               </a:ext>
             </a:extLst>
           </p:cNvPr>
@@ -3285,7 +3285,7 @@
             </a:lvl1pPr>
           </a:lstStyle>
           <a:p>
-            <a:fld id="{0B8B9F99-5149-41DD-AB24-BAFB1B47C3F9}" type="slidenum">
+            <a:fld id="{94860267-42AB-4F84-B253-BA3B6EFBB2FE}" type="slidenum">
               <a:rPr kumimoji="1" lang="ja-JP" altLang="en-US" smtClean="0"/>
               <a:t>‹#›</a:t>
             </a:fld>
@@ -3296,7 +3296,7 @@
     </p:spTree>
     <p:extLst>
       <p:ext uri="{BB962C8B-B14F-4D97-AF65-F5344CB8AC3E}">
-        <p14:creationId xmlns:p14="http://schemas.microsoft.com/office/powerpoint/2010/main" val="2805575213"/>
+        <p14:creationId xmlns:p14="http://schemas.microsoft.com/office/powerpoint/2010/main" val="2459373964"/>
       </p:ext>
     </p:extLst>
   </p:cSld>
@@ -3619,7 +3619,7 @@
           <p:cNvPr id="2" name="テキスト ボックス 1">
             <a:extLst>
               <a:ext uri="{FF2B5EF4-FFF2-40B4-BE49-F238E27FC236}">
-                <a16:creationId xmlns:a16="http://schemas.microsoft.com/office/drawing/2014/main" id="{8DEB4708-8129-E2CA-92F8-6E96654623D4}"/>
+                <a16:creationId xmlns:a16="http://schemas.microsoft.com/office/drawing/2014/main" id="{257E00DA-5AAE-CDFD-8DC0-17306A1176D7}"/>
               </a:ext>
             </a:extLst>
           </p:cNvPr>
@@ -3665,7 +3665,7 @@
           <p:cNvPr id="3" name="テキスト ボックス 2">
             <a:extLst>
               <a:ext uri="{FF2B5EF4-FFF2-40B4-BE49-F238E27FC236}">
-                <a16:creationId xmlns:a16="http://schemas.microsoft.com/office/drawing/2014/main" id="{0C183AB7-BDCB-06C0-C6A5-133A282FA974}"/>
+                <a16:creationId xmlns:a16="http://schemas.microsoft.com/office/drawing/2014/main" id="{B5E9FA56-844E-74DF-D083-0CF97C190B30}"/>
               </a:ext>
             </a:extLst>
           </p:cNvPr>
@@ -3695,14 +3695,17 @@
                 </a:solidFill>
                 <a:latin typeface="Arial" panose="020B0604020202020204" pitchFamily="34" charset="0"/>
               </a:rPr>
-              <a:t>cross-genre TECH EXPLANATION</a:t>
-            </a:r>
-            <a:endParaRPr kumimoji="1" lang="ja-JP" altLang="en-US" sz="3400" b="1">
-              <a:solidFill>
-                <a:srgbClr val="111111"/>
-              </a:solidFill>
-              <a:latin typeface="Arial" panose="020B0604020202020204" pitchFamily="34" charset="0"/>
-            </a:endParaRPr>
+              <a:t>Cross Genre</a:t>
+            </a:r>
+            <a:r>
+              <a:rPr kumimoji="1" lang="ja-JP" altLang="en-US" sz="3400" b="1">
+                <a:solidFill>
+                  <a:srgbClr val="111111"/>
+                </a:solidFill>
+                <a:latin typeface="Arial" panose="020B0604020202020204" pitchFamily="34" charset="0"/>
+              </a:rPr>
+              <a:t>の技術解説</a:t>
+            </a:r>
           </a:p>
         </p:txBody>
       </p:sp>
@@ -3711,7 +3714,7 @@
           <p:cNvPr id="4" name="テキスト ボックス 3">
             <a:extLst>
               <a:ext uri="{FF2B5EF4-FFF2-40B4-BE49-F238E27FC236}">
-                <a16:creationId xmlns:a16="http://schemas.microsoft.com/office/drawing/2014/main" id="{5BE7E17E-175C-56CB-58A4-9B7096D4B8B3}"/>
+                <a16:creationId xmlns:a16="http://schemas.microsoft.com/office/drawing/2014/main" id="{EFC2C99C-D4C5-68F2-9349-BC925AF19491}"/>
               </a:ext>
             </a:extLst>
           </p:cNvPr>
@@ -3735,20 +3738,14 @@
           <a:lstStyle/>
           <a:p>
             <a:r>
-              <a:rPr kumimoji="1" lang="en-US" altLang="ja-JP" sz="2000">
+              <a:rPr kumimoji="1" lang="ja-JP" altLang="en-US" sz="2000">
                 <a:solidFill>
                   <a:srgbClr val="333333"/>
                 </a:solidFill>
                 <a:latin typeface="Arial" panose="020B0604020202020204" pitchFamily="34" charset="0"/>
               </a:rPr>
-              <a:t>Architecture, implementation and commit history in 75 seconds</a:t>
-            </a:r>
-            <a:endParaRPr kumimoji="1" lang="ja-JP" altLang="en-US" sz="2000">
-              <a:solidFill>
-                <a:srgbClr val="333333"/>
-              </a:solidFill>
-              <a:latin typeface="Arial" panose="020B0604020202020204" pitchFamily="34" charset="0"/>
-            </a:endParaRPr>
+              <a:t>設計・実装・コミットから学ぶ短時間プレビュー</a:t>
+            </a:r>
           </a:p>
         </p:txBody>
       </p:sp>
@@ -3757,7 +3754,7 @@
           <p:cNvPr id="5" name="テキスト ボックス 4">
             <a:extLst>
               <a:ext uri="{FF2B5EF4-FFF2-40B4-BE49-F238E27FC236}">
-                <a16:creationId xmlns:a16="http://schemas.microsoft.com/office/drawing/2014/main" id="{48BECA5A-BD39-2528-2442-2C06A1AB42FD}"/>
+                <a16:creationId xmlns:a16="http://schemas.microsoft.com/office/drawing/2014/main" id="{6FF17070-EEA7-18D6-956F-0D75F8C1AF1D}"/>
               </a:ext>
             </a:extLst>
           </p:cNvPr>
@@ -3804,7 +3801,7 @@
             <a:hlinkClick r:id="" action="ppaction://media"/>
             <a:extLst>
               <a:ext uri="{FF2B5EF4-FFF2-40B4-BE49-F238E27FC236}">
-                <a16:creationId xmlns:a16="http://schemas.microsoft.com/office/drawing/2014/main" id="{6C7EF571-CA29-4D55-89CA-499F5D27FB83}"/>
+                <a16:creationId xmlns:a16="http://schemas.microsoft.com/office/drawing/2014/main" id="{50BD3E3D-BD66-E04E-3FAF-A1E40F786991}"/>
               </a:ext>
             </a:extLst>
           </p:cNvPr>
@@ -3839,7 +3836,7 @@
     </p:spTree>
     <p:extLst>
       <p:ext uri="{BB962C8B-B14F-4D97-AF65-F5344CB8AC3E}">
-        <p14:creationId xmlns:p14="http://schemas.microsoft.com/office/powerpoint/2010/main" val="4204772563"/>
+        <p14:creationId xmlns:p14="http://schemas.microsoft.com/office/powerpoint/2010/main" val="88112900"/>
       </p:ext>
     </p:extLst>
   </p:cSld>
@@ -3963,7 +3960,7 @@
           <p:cNvPr id="2" name="テキスト ボックス 1">
             <a:extLst>
               <a:ext uri="{FF2B5EF4-FFF2-40B4-BE49-F238E27FC236}">
-                <a16:creationId xmlns:a16="http://schemas.microsoft.com/office/drawing/2014/main" id="{F965D50E-DFBE-FFFE-2DD5-E9BCA0FB4051}"/>
+                <a16:creationId xmlns:a16="http://schemas.microsoft.com/office/drawing/2014/main" id="{E6FA3184-DA98-68D1-E873-2B12C6235FCD}"/>
               </a:ext>
             </a:extLst>
           </p:cNvPr>
@@ -4009,7 +4006,7 @@
           <p:cNvPr id="3" name="テキスト ボックス 2">
             <a:extLst>
               <a:ext uri="{FF2B5EF4-FFF2-40B4-BE49-F238E27FC236}">
-                <a16:creationId xmlns:a16="http://schemas.microsoft.com/office/drawing/2014/main" id="{500C6AE3-59D6-9083-8C6E-744D3C5846C8}"/>
+                <a16:creationId xmlns:a16="http://schemas.microsoft.com/office/drawing/2014/main" id="{5BC65C58-950F-2899-FDE8-316FBA2DD4D9}"/>
               </a:ext>
             </a:extLst>
           </p:cNvPr>
@@ -4033,20 +4030,14 @@
           <a:lstStyle/>
           <a:p>
             <a:r>
-              <a:rPr kumimoji="1" lang="en-US" altLang="ja-JP" sz="3400" b="1">
+              <a:rPr kumimoji="1" lang="ja-JP" altLang="en-US" sz="3400" b="1">
                 <a:solidFill>
                   <a:srgbClr val="111111"/>
                 </a:solidFill>
                 <a:latin typeface="Arial" panose="020B0604020202020204" pitchFamily="34" charset="0"/>
               </a:rPr>
-              <a:t>WHAT DOES IT SOLVE?</a:t>
-            </a:r>
-            <a:endParaRPr kumimoji="1" lang="ja-JP" altLang="en-US" sz="3400" b="1">
-              <a:solidFill>
-                <a:srgbClr val="111111"/>
-              </a:solidFill>
-              <a:latin typeface="Arial" panose="020B0604020202020204" pitchFamily="34" charset="0"/>
-            </a:endParaRPr>
+              <a:t>このプロジェクトは何を解決する？</a:t>
+            </a:r>
           </a:p>
         </p:txBody>
       </p:sp>
@@ -4055,7 +4046,7 @@
           <p:cNvPr id="4" name="テキスト ボックス 3">
             <a:extLst>
               <a:ext uri="{FF2B5EF4-FFF2-40B4-BE49-F238E27FC236}">
-                <a16:creationId xmlns:a16="http://schemas.microsoft.com/office/drawing/2014/main" id="{B6A32B6A-EF10-45DC-DE6A-44F2ADFA3630}"/>
+                <a16:creationId xmlns:a16="http://schemas.microsoft.com/office/drawing/2014/main" id="{7D7DE548-528D-CBE1-7C30-D857C7958175}"/>
               </a:ext>
             </a:extLst>
           </p:cNvPr>
@@ -4104,7 +4095,7 @@
           <p:cNvPr id="5" name="テキスト ボックス 4">
             <a:extLst>
               <a:ext uri="{FF2B5EF4-FFF2-40B4-BE49-F238E27FC236}">
-                <a16:creationId xmlns:a16="http://schemas.microsoft.com/office/drawing/2014/main" id="{52C8BB7A-42A2-7BB5-724A-32335A2441B1}"/>
+                <a16:creationId xmlns:a16="http://schemas.microsoft.com/office/drawing/2014/main" id="{1EE35C30-67A5-48E2-7648-C1DE848F84C2}"/>
               </a:ext>
             </a:extLst>
           </p:cNvPr>
@@ -4151,7 +4142,7 @@
             <a:hlinkClick r:id="" action="ppaction://media"/>
             <a:extLst>
               <a:ext uri="{FF2B5EF4-FFF2-40B4-BE49-F238E27FC236}">
-                <a16:creationId xmlns:a16="http://schemas.microsoft.com/office/drawing/2014/main" id="{EE930D29-D1F7-6012-5A42-BAE3044079C8}"/>
+                <a16:creationId xmlns:a16="http://schemas.microsoft.com/office/drawing/2014/main" id="{2D77532B-74A2-5C35-D35C-00BD43138291}"/>
               </a:ext>
             </a:extLst>
           </p:cNvPr>
@@ -4186,7 +4177,7 @@
     </p:spTree>
     <p:extLst>
       <p:ext uri="{BB962C8B-B14F-4D97-AF65-F5344CB8AC3E}">
-        <p14:creationId xmlns:p14="http://schemas.microsoft.com/office/powerpoint/2010/main" val="2036218183"/>
+        <p14:creationId xmlns:p14="http://schemas.microsoft.com/office/powerpoint/2010/main" val="727593577"/>
       </p:ext>
     </p:extLst>
   </p:cSld>
@@ -4310,7 +4301,7 @@
           <p:cNvPr id="2" name="テキスト ボックス 1">
             <a:extLst>
               <a:ext uri="{FF2B5EF4-FFF2-40B4-BE49-F238E27FC236}">
-                <a16:creationId xmlns:a16="http://schemas.microsoft.com/office/drawing/2014/main" id="{29104392-046A-2146-F434-B8BC6BA6DBD0}"/>
+                <a16:creationId xmlns:a16="http://schemas.microsoft.com/office/drawing/2014/main" id="{E1D4772D-FB84-80DB-2C6B-4ED86C2525E0}"/>
               </a:ext>
             </a:extLst>
           </p:cNvPr>
@@ -4356,7 +4347,7 @@
           <p:cNvPr id="3" name="テキスト ボックス 2">
             <a:extLst>
               <a:ext uri="{FF2B5EF4-FFF2-40B4-BE49-F238E27FC236}">
-                <a16:creationId xmlns:a16="http://schemas.microsoft.com/office/drawing/2014/main" id="{3915E97F-735B-97B6-F96D-3A4703371AE6}"/>
+                <a16:creationId xmlns:a16="http://schemas.microsoft.com/office/drawing/2014/main" id="{42830936-8263-4DB5-CAAE-1B63B8753FE1}"/>
               </a:ext>
             </a:extLst>
           </p:cNvPr>
@@ -4380,20 +4371,14 @@
           <a:lstStyle/>
           <a:p>
             <a:r>
-              <a:rPr kumimoji="1" lang="en-US" altLang="ja-JP" sz="3400" b="1">
+              <a:rPr kumimoji="1" lang="ja-JP" altLang="en-US" sz="3400" b="1">
                 <a:solidFill>
                   <a:srgbClr val="111111"/>
                 </a:solidFill>
                 <a:latin typeface="Arial" panose="020B0604020202020204" pitchFamily="34" charset="0"/>
               </a:rPr>
-              <a:t>TECH STACK</a:t>
-            </a:r>
-            <a:endParaRPr kumimoji="1" lang="ja-JP" altLang="en-US" sz="3400" b="1">
-              <a:solidFill>
-                <a:srgbClr val="111111"/>
-              </a:solidFill>
-              <a:latin typeface="Arial" panose="020B0604020202020204" pitchFamily="34" charset="0"/>
-            </a:endParaRPr>
+              <a:t>技術スタック</a:t>
+            </a:r>
           </a:p>
         </p:txBody>
       </p:sp>
@@ -4402,7 +4387,7 @@
           <p:cNvPr id="4" name="テキスト ボックス 3">
             <a:extLst>
               <a:ext uri="{FF2B5EF4-FFF2-40B4-BE49-F238E27FC236}">
-                <a16:creationId xmlns:a16="http://schemas.microsoft.com/office/drawing/2014/main" id="{8B195124-7E56-4E36-FC7A-7A23E181DB32}"/>
+                <a16:creationId xmlns:a16="http://schemas.microsoft.com/office/drawing/2014/main" id="{0FF6EBBB-2568-F315-BB37-97D85538DB1B}"/>
               </a:ext>
             </a:extLst>
           </p:cNvPr>
@@ -4412,7 +4397,7 @@
         <p:spPr>
           <a:xfrm>
             <a:off x="533400" y="3429000"/>
-            <a:ext cx="10795000" cy="400110"/>
+            <a:ext cx="10795000" cy="707886"/>
           </a:xfrm>
           <a:prstGeom prst="rect">
             <a:avLst/>
@@ -4426,13 +4411,22 @@
           <a:lstStyle/>
           <a:p>
             <a:r>
+              <a:rPr kumimoji="1" lang="ja-JP" altLang="en-US" sz="2000">
+                <a:solidFill>
+                  <a:srgbClr val="333333"/>
+                </a:solidFill>
+                <a:latin typeface="Arial" panose="020B0604020202020204" pitchFamily="34" charset="0"/>
+              </a:rPr>
+              <a:t>主要技術：</a:t>
+            </a:r>
+            <a:r>
               <a:rPr kumimoji="1" lang="en-US" altLang="ja-JP" sz="2000">
                 <a:solidFill>
                   <a:srgbClr val="333333"/>
                 </a:solidFill>
                 <a:latin typeface="Arial" panose="020B0604020202020204" pitchFamily="34" charset="0"/>
               </a:rPr>
-              <a:t>Primary technologies: TypeScript</a:t>
+              <a:t>TypeScript</a:t>
             </a:r>
             <a:r>
               <a:rPr kumimoji="1" lang="ja-JP" altLang="en-US" sz="2000">
@@ -4468,14 +4462,18 @@
                 </a:solidFill>
                 <a:latin typeface="Arial" panose="020B0604020202020204" pitchFamily="34" charset="0"/>
               </a:rPr>
-              <a:t>JavaScript</a:t>
-            </a:r>
-            <a:endParaRPr kumimoji="1" lang="ja-JP" altLang="en-US" sz="2000">
-              <a:solidFill>
-                <a:srgbClr val="333333"/>
-              </a:solidFill>
-              <a:latin typeface="Arial" panose="020B0604020202020204" pitchFamily="34" charset="0"/>
-            </a:endParaRPr>
+              <a:t>JavaScript
+</a:t>
+            </a:r>
+            <a:r>
+              <a:rPr kumimoji="1" lang="ja-JP" altLang="en-US" sz="2000">
+                <a:solidFill>
+                  <a:srgbClr val="333333"/>
+                </a:solidFill>
+                <a:latin typeface="Arial" panose="020B0604020202020204" pitchFamily="34" charset="0"/>
+              </a:rPr>
+              <a:t>役割を分け、保守しやすい構成を目指しています。</a:t>
+            </a:r>
           </a:p>
         </p:txBody>
       </p:sp>
@@ -4484,7 +4482,7 @@
           <p:cNvPr id="5" name="テキスト ボックス 4">
             <a:extLst>
               <a:ext uri="{FF2B5EF4-FFF2-40B4-BE49-F238E27FC236}">
-                <a16:creationId xmlns:a16="http://schemas.microsoft.com/office/drawing/2014/main" id="{23809148-4639-AA0F-8616-EE94A5436EB7}"/>
+                <a16:creationId xmlns:a16="http://schemas.microsoft.com/office/drawing/2014/main" id="{7E1B7494-1BA2-0B9D-31A4-CB1C8422B67D}"/>
               </a:ext>
             </a:extLst>
           </p:cNvPr>
@@ -4531,7 +4529,7 @@
             <a:hlinkClick r:id="" action="ppaction://media"/>
             <a:extLst>
               <a:ext uri="{FF2B5EF4-FFF2-40B4-BE49-F238E27FC236}">
-                <a16:creationId xmlns:a16="http://schemas.microsoft.com/office/drawing/2014/main" id="{83407244-F80F-DDBA-4BBE-5C4F85E6B591}"/>
+                <a16:creationId xmlns:a16="http://schemas.microsoft.com/office/drawing/2014/main" id="{484FC45E-7E4E-56D0-0F17-F4A20255785B}"/>
               </a:ext>
             </a:extLst>
           </p:cNvPr>
@@ -4566,7 +4564,7 @@
     </p:spTree>
     <p:extLst>
       <p:ext uri="{BB962C8B-B14F-4D97-AF65-F5344CB8AC3E}">
-        <p14:creationId xmlns:p14="http://schemas.microsoft.com/office/powerpoint/2010/main" val="3457666975"/>
+        <p14:creationId xmlns:p14="http://schemas.microsoft.com/office/powerpoint/2010/main" val="2595384885"/>
       </p:ext>
     </p:extLst>
   </p:cSld>
@@ -4690,7 +4688,7 @@
           <p:cNvPr id="2" name="テキスト ボックス 1">
             <a:extLst>
               <a:ext uri="{FF2B5EF4-FFF2-40B4-BE49-F238E27FC236}">
-                <a16:creationId xmlns:a16="http://schemas.microsoft.com/office/drawing/2014/main" id="{2BC59F2A-739B-687C-1450-384DDDCC74E2}"/>
+                <a16:creationId xmlns:a16="http://schemas.microsoft.com/office/drawing/2014/main" id="{43EE81CB-CAF2-10F5-8B8A-90929DD9F38D}"/>
               </a:ext>
             </a:extLst>
           </p:cNvPr>
@@ -4736,7 +4734,7 @@
           <p:cNvPr id="3" name="テキスト ボックス 2">
             <a:extLst>
               <a:ext uri="{FF2B5EF4-FFF2-40B4-BE49-F238E27FC236}">
-                <a16:creationId xmlns:a16="http://schemas.microsoft.com/office/drawing/2014/main" id="{B5958CA1-ED0B-6C77-8E80-A9480234D285}"/>
+                <a16:creationId xmlns:a16="http://schemas.microsoft.com/office/drawing/2014/main" id="{18853B9B-5E14-4923-0271-CBD829648A01}"/>
               </a:ext>
             </a:extLst>
           </p:cNvPr>
@@ -4760,20 +4758,14 @@
           <a:lstStyle/>
           <a:p>
             <a:r>
-              <a:rPr kumimoji="1" lang="en-US" altLang="ja-JP" sz="3400" b="1">
+              <a:rPr kumimoji="1" lang="ja-JP" altLang="en-US" sz="3400" b="1">
                 <a:solidFill>
                   <a:srgbClr val="111111"/>
                 </a:solidFill>
                 <a:latin typeface="Arial" panose="020B0604020202020204" pitchFamily="34" charset="0"/>
               </a:rPr>
-              <a:t>REPOSITORY HIGHLIGHTS</a:t>
-            </a:r>
-            <a:endParaRPr kumimoji="1" lang="ja-JP" altLang="en-US" sz="3400" b="1">
-              <a:solidFill>
-                <a:srgbClr val="111111"/>
-              </a:solidFill>
-              <a:latin typeface="Arial" panose="020B0604020202020204" pitchFamily="34" charset="0"/>
-            </a:endParaRPr>
+              <a:t>リポジトリの読みどころ</a:t>
+            </a:r>
           </a:p>
         </p:txBody>
       </p:sp>
@@ -4782,7 +4774,7 @@
           <p:cNvPr id="4" name="テキスト ボックス 3">
             <a:extLst>
               <a:ext uri="{FF2B5EF4-FFF2-40B4-BE49-F238E27FC236}">
-                <a16:creationId xmlns:a16="http://schemas.microsoft.com/office/drawing/2014/main" id="{5FE23EAC-2837-DC3E-B907-FA4B1C0D9B5F}"/>
+                <a16:creationId xmlns:a16="http://schemas.microsoft.com/office/drawing/2014/main" id="{17258FEF-163A-E33D-20E1-ED9CCD49FC94}"/>
               </a:ext>
             </a:extLst>
           </p:cNvPr>
@@ -4792,7 +4784,7 @@
         <p:spPr>
           <a:xfrm>
             <a:off x="533400" y="3429000"/>
-            <a:ext cx="10795000" cy="400110"/>
+            <a:ext cx="10795000" cy="707886"/>
           </a:xfrm>
           <a:prstGeom prst="rect">
             <a:avLst/>
@@ -4806,13 +4798,77 @@
           <a:lstStyle/>
           <a:p>
             <a:r>
+              <a:rPr kumimoji="1" lang="ja-JP" altLang="en-US" sz="2000">
+                <a:solidFill>
+                  <a:srgbClr val="333333"/>
+                </a:solidFill>
+                <a:latin typeface="Arial" panose="020B0604020202020204" pitchFamily="34" charset="0"/>
+              </a:rPr>
+              <a:t>公開コード、</a:t>
+            </a:r>
+            <a:r>
               <a:rPr kumimoji="1" lang="en-US" altLang="ja-JP" sz="2000">
                 <a:solidFill>
                   <a:srgbClr val="333333"/>
                 </a:solidFill>
                 <a:latin typeface="Arial" panose="020B0604020202020204" pitchFamily="34" charset="0"/>
               </a:rPr>
-              <a:t>Public source code, README and commit history reveal the design decisions.</a:t>
+              <a:t>README</a:t>
+            </a:r>
+            <a:r>
+              <a:rPr kumimoji="1" lang="ja-JP" altLang="en-US" sz="2000">
+                <a:solidFill>
+                  <a:srgbClr val="333333"/>
+                </a:solidFill>
+                <a:latin typeface="Arial" panose="020B0604020202020204" pitchFamily="34" charset="0"/>
+              </a:rPr>
+              <a:t>、コミット履歴から設計判断を確認できます。
+主なファイル：</a:t>
+            </a:r>
+            <a:r>
+              <a:rPr kumimoji="1" lang="en-US" altLang="ja-JP" sz="2000">
+                <a:solidFill>
+                  <a:srgbClr val="333333"/>
+                </a:solidFill>
+                <a:latin typeface="Arial" panose="020B0604020202020204" pitchFamily="34" charset="0"/>
+              </a:rPr>
+              <a:t>app</a:t>
+            </a:r>
+            <a:r>
+              <a:rPr kumimoji="1" lang="ja-JP" altLang="en-US" sz="2000">
+                <a:solidFill>
+                  <a:srgbClr val="333333"/>
+                </a:solidFill>
+                <a:latin typeface="Arial" panose="020B0604020202020204" pitchFamily="34" charset="0"/>
+              </a:rPr>
+              <a:t>、</a:t>
+            </a:r>
+            <a:r>
+              <a:rPr kumimoji="1" lang="en-US" altLang="ja-JP" sz="2000">
+                <a:solidFill>
+                  <a:srgbClr val="333333"/>
+                </a:solidFill>
+                <a:latin typeface="Arial" panose="020B0604020202020204" pitchFamily="34" charset="0"/>
+              </a:rPr>
+              <a:t>components</a:t>
+            </a:r>
+            <a:r>
+              <a:rPr kumimoji="1" lang="ja-JP" altLang="en-US" sz="2000">
+                <a:solidFill>
+                  <a:srgbClr val="333333"/>
+                </a:solidFill>
+                <a:latin typeface="Arial" panose="020B0604020202020204" pitchFamily="34" charset="0"/>
+              </a:rPr>
+              <a:t>、</a:t>
+            </a:r>
+            <a:r>
+              <a:rPr kumimoji="1" lang="en-US" altLang="ja-JP" sz="2000">
+                <a:solidFill>
+                  <a:srgbClr val="333333"/>
+                </a:solidFill>
+                <a:latin typeface="Arial" panose="020B0604020202020204" pitchFamily="34" charset="0"/>
+              </a:rPr>
+              <a:t>data</a:t>
             </a:r>
             <a:endParaRPr kumimoji="1" lang="ja-JP" altLang="en-US" sz="2000">
               <a:solidFill>
@@ -4828,7 +4884,7 @@
           <p:cNvPr id="5" name="テキスト ボックス 4">
             <a:extLst>
               <a:ext uri="{FF2B5EF4-FFF2-40B4-BE49-F238E27FC236}">
-                <a16:creationId xmlns:a16="http://schemas.microsoft.com/office/drawing/2014/main" id="{A6CF2038-3FC0-BA59-3010-23A9A417678A}"/>
+                <a16:creationId xmlns:a16="http://schemas.microsoft.com/office/drawing/2014/main" id="{007BF3BA-191D-9739-7A2E-D07407261567}"/>
               </a:ext>
             </a:extLst>
           </p:cNvPr>
@@ -4875,7 +4931,7 @@
             <a:hlinkClick r:id="" action="ppaction://media"/>
             <a:extLst>
               <a:ext uri="{FF2B5EF4-FFF2-40B4-BE49-F238E27FC236}">
-                <a16:creationId xmlns:a16="http://schemas.microsoft.com/office/drawing/2014/main" id="{949A1E23-5C2A-8E94-B1A8-1BBAEFC34594}"/>
+                <a16:creationId xmlns:a16="http://schemas.microsoft.com/office/drawing/2014/main" id="{3F66481C-7B54-094F-233A-178270B03C35}"/>
               </a:ext>
             </a:extLst>
           </p:cNvPr>
@@ -4910,7 +4966,7 @@
     </p:spTree>
     <p:extLst>
       <p:ext uri="{BB962C8B-B14F-4D97-AF65-F5344CB8AC3E}">
-        <p14:creationId xmlns:p14="http://schemas.microsoft.com/office/powerpoint/2010/main" val="1910415495"/>
+        <p14:creationId xmlns:p14="http://schemas.microsoft.com/office/powerpoint/2010/main" val="873554973"/>
       </p:ext>
     </p:extLst>
   </p:cSld>
@@ -5034,7 +5090,7 @@
           <p:cNvPr id="2" name="テキスト ボックス 1">
             <a:extLst>
               <a:ext uri="{FF2B5EF4-FFF2-40B4-BE49-F238E27FC236}">
-                <a16:creationId xmlns:a16="http://schemas.microsoft.com/office/drawing/2014/main" id="{4D9862BB-C6D3-0F4E-5E33-0FD8E5D1B3EB}"/>
+                <a16:creationId xmlns:a16="http://schemas.microsoft.com/office/drawing/2014/main" id="{5B6A22CA-F4DC-B8E1-7920-16F3A80A8B97}"/>
               </a:ext>
             </a:extLst>
           </p:cNvPr>
@@ -5080,7 +5136,7 @@
           <p:cNvPr id="3" name="テキスト ボックス 2">
             <a:extLst>
               <a:ext uri="{FF2B5EF4-FFF2-40B4-BE49-F238E27FC236}">
-                <a16:creationId xmlns:a16="http://schemas.microsoft.com/office/drawing/2014/main" id="{E87A8201-D225-590E-7B39-93CFD21C5BDE}"/>
+                <a16:creationId xmlns:a16="http://schemas.microsoft.com/office/drawing/2014/main" id="{90BCA456-2AB1-EF28-0500-1AF46E43B980}"/>
               </a:ext>
             </a:extLst>
           </p:cNvPr>
@@ -5104,20 +5160,14 @@
           <a:lstStyle/>
           <a:p>
             <a:r>
-              <a:rPr kumimoji="1" lang="en-US" altLang="ja-JP" sz="3400" b="1">
+              <a:rPr kumimoji="1" lang="ja-JP" altLang="en-US" sz="3400" b="1">
                 <a:solidFill>
                   <a:srgbClr val="111111"/>
                 </a:solidFill>
                 <a:latin typeface="Arial" panose="020B0604020202020204" pitchFamily="34" charset="0"/>
               </a:rPr>
-              <a:t>ITERATIVE IMPROVEMENT</a:t>
-            </a:r>
-            <a:endParaRPr kumimoji="1" lang="ja-JP" altLang="en-US" sz="3400" b="1">
-              <a:solidFill>
-                <a:srgbClr val="111111"/>
-              </a:solidFill>
-              <a:latin typeface="Arial" panose="020B0604020202020204" pitchFamily="34" charset="0"/>
-            </a:endParaRPr>
+              <a:t>コミットから分かる改善</a:t>
+            </a:r>
           </a:p>
         </p:txBody>
       </p:sp>
@@ -5126,7 +5176,7 @@
           <p:cNvPr id="4" name="テキスト ボックス 3">
             <a:extLst>
               <a:ext uri="{FF2B5EF4-FFF2-40B4-BE49-F238E27FC236}">
-                <a16:creationId xmlns:a16="http://schemas.microsoft.com/office/drawing/2014/main" id="{4936BEDD-4294-1AAD-4D51-B99305F5C5F1}"/>
+                <a16:creationId xmlns:a16="http://schemas.microsoft.com/office/drawing/2014/main" id="{E762AB1D-5D87-6E30-1AD2-50A24660C4B0}"/>
               </a:ext>
             </a:extLst>
           </p:cNvPr>
@@ -5156,7 +5206,7 @@
                 </a:solidFill>
                 <a:latin typeface="Arial" panose="020B0604020202020204" pitchFamily="34" charset="0"/>
               </a:rPr>
-              <a:t>Small commits continuously improve features, quality and release readiness.</a:t>
+              <a:t>Upgrade Next.js to fix critical security vulnerabilities</a:t>
             </a:r>
             <a:endParaRPr kumimoji="1" lang="ja-JP" altLang="en-US" sz="2000">
               <a:solidFill>
@@ -5172,7 +5222,7 @@
           <p:cNvPr id="5" name="テキスト ボックス 4">
             <a:extLst>
               <a:ext uri="{FF2B5EF4-FFF2-40B4-BE49-F238E27FC236}">
-                <a16:creationId xmlns:a16="http://schemas.microsoft.com/office/drawing/2014/main" id="{1A6AF748-790B-BD81-2FB1-9CE12748743B}"/>
+                <a16:creationId xmlns:a16="http://schemas.microsoft.com/office/drawing/2014/main" id="{3870C9D2-3794-AA89-1998-768B9820B781}"/>
               </a:ext>
             </a:extLst>
           </p:cNvPr>
@@ -5219,7 +5269,7 @@
             <a:hlinkClick r:id="" action="ppaction://media"/>
             <a:extLst>
               <a:ext uri="{FF2B5EF4-FFF2-40B4-BE49-F238E27FC236}">
-                <a16:creationId xmlns:a16="http://schemas.microsoft.com/office/drawing/2014/main" id="{0AD94BAE-694C-D5DF-EB51-1DC35737B8C3}"/>
+                <a16:creationId xmlns:a16="http://schemas.microsoft.com/office/drawing/2014/main" id="{53CFF85B-034F-CA16-0891-6388BCD29875}"/>
               </a:ext>
             </a:extLst>
           </p:cNvPr>
@@ -5254,7 +5304,7 @@
     </p:spTree>
     <p:extLst>
       <p:ext uri="{BB962C8B-B14F-4D97-AF65-F5344CB8AC3E}">
-        <p14:creationId xmlns:p14="http://schemas.microsoft.com/office/powerpoint/2010/main" val="2539050"/>
+        <p14:creationId xmlns:p14="http://schemas.microsoft.com/office/powerpoint/2010/main" val="250450744"/>
       </p:ext>
     </p:extLst>
   </p:cSld>
@@ -5378,7 +5428,7 @@
           <p:cNvPr id="2" name="テキスト ボックス 1">
             <a:extLst>
               <a:ext uri="{FF2B5EF4-FFF2-40B4-BE49-F238E27FC236}">
-                <a16:creationId xmlns:a16="http://schemas.microsoft.com/office/drawing/2014/main" id="{E021902A-E87B-D2DC-2CBC-ED8C98135CEC}"/>
+                <a16:creationId xmlns:a16="http://schemas.microsoft.com/office/drawing/2014/main" id="{2C64EE6F-9874-558D-8FF4-07B8F5F56BD0}"/>
               </a:ext>
             </a:extLst>
           </p:cNvPr>
@@ -5424,7 +5474,7 @@
           <p:cNvPr id="3" name="テキスト ボックス 2">
             <a:extLst>
               <a:ext uri="{FF2B5EF4-FFF2-40B4-BE49-F238E27FC236}">
-                <a16:creationId xmlns:a16="http://schemas.microsoft.com/office/drawing/2014/main" id="{57104815-AB5A-4573-4B8F-77C44F06D0EC}"/>
+                <a16:creationId xmlns:a16="http://schemas.microsoft.com/office/drawing/2014/main" id="{FB968CB3-1C25-C833-2D3B-6B1953851970}"/>
               </a:ext>
             </a:extLst>
           </p:cNvPr>
@@ -5448,20 +5498,14 @@
           <a:lstStyle/>
           <a:p>
             <a:r>
-              <a:rPr kumimoji="1" lang="en-US" altLang="ja-JP" sz="3400" b="1">
+              <a:rPr kumimoji="1" lang="ja-JP" altLang="en-US" sz="3400" b="1">
                 <a:solidFill>
                   <a:srgbClr val="111111"/>
                 </a:solidFill>
                 <a:latin typeface="Arial" panose="020B0604020202020204" pitchFamily="34" charset="0"/>
               </a:rPr>
-              <a:t>READ THE FULL ARTICLE</a:t>
-            </a:r>
-            <a:endParaRPr kumimoji="1" lang="ja-JP" altLang="en-US" sz="3400" b="1">
-              <a:solidFill>
-                <a:srgbClr val="111111"/>
-              </a:solidFill>
-              <a:latin typeface="Arial" panose="020B0604020202020204" pitchFamily="34" charset="0"/>
-            </a:endParaRPr>
+              <a:t>詳しくは積み上げログへ</a:t>
+            </a:r>
           </a:p>
         </p:txBody>
       </p:sp>
@@ -5470,7 +5514,7 @@
           <p:cNvPr id="4" name="テキスト ボックス 3">
             <a:extLst>
               <a:ext uri="{FF2B5EF4-FFF2-40B4-BE49-F238E27FC236}">
-                <a16:creationId xmlns:a16="http://schemas.microsoft.com/office/drawing/2014/main" id="{8298A1C4-C636-D5B3-BB70-7961B74F852A}"/>
+                <a16:creationId xmlns:a16="http://schemas.microsoft.com/office/drawing/2014/main" id="{E990EEB0-A587-28AC-81F6-92079C5FAB5E}"/>
               </a:ext>
             </a:extLst>
           </p:cNvPr>
@@ -5494,14 +5538,32 @@
           <a:lstStyle/>
           <a:p>
             <a:r>
-              <a:rPr kumimoji="1" lang="sv-SE" altLang="ja-JP" sz="2000">
+              <a:rPr kumimoji="1" lang="zh-TW" altLang="en-US" sz="2000">
+                <a:solidFill>
+                  <a:srgbClr val="333333"/>
+                </a:solidFill>
+                <a:latin typeface="Arial" panose="020B0604020202020204" pitchFamily="34" charset="0"/>
+              </a:rPr>
+              <a:t>記事： </a:t>
+            </a:r>
+            <a:r>
+              <a:rPr kumimoji="1" lang="en-US" altLang="zh-TW" sz="2000">
                 <a:solidFill>
                   <a:srgbClr val="333333"/>
                 </a:solidFill>
                 <a:latin typeface="Arial" panose="020B0604020202020204" pitchFamily="34" charset="0"/>
               </a:rPr>
               <a:t>https://syunnjack.dev/articles/cross-genre
-TSUMIAGE LOG</a:t>
+</a:t>
+            </a:r>
+            <a:r>
+              <a:rPr kumimoji="1" lang="zh-TW" altLang="en-US" sz="2000">
+                <a:solidFill>
+                  <a:srgbClr val="333333"/>
+                </a:solidFill>
+                <a:latin typeface="Arial" panose="020B0604020202020204" pitchFamily="34" charset="0"/>
+              </a:rPr>
+              <a:t>学び、作り、振り返る開発記録。</a:t>
             </a:r>
             <a:endParaRPr kumimoji="1" lang="ja-JP" altLang="en-US" sz="2000">
               <a:solidFill>
@@ -5517,7 +5579,7 @@
           <p:cNvPr id="5" name="テキスト ボックス 4">
             <a:extLst>
               <a:ext uri="{FF2B5EF4-FFF2-40B4-BE49-F238E27FC236}">
-                <a16:creationId xmlns:a16="http://schemas.microsoft.com/office/drawing/2014/main" id="{29BA2EEB-39F3-4BE6-A32B-80A8889AB413}"/>
+                <a16:creationId xmlns:a16="http://schemas.microsoft.com/office/drawing/2014/main" id="{7571E11D-11EB-D166-FC18-1D7090163C2B}"/>
               </a:ext>
             </a:extLst>
           </p:cNvPr>
@@ -5564,7 +5626,7 @@
             <a:hlinkClick r:id="" action="ppaction://media"/>
             <a:extLst>
               <a:ext uri="{FF2B5EF4-FFF2-40B4-BE49-F238E27FC236}">
-                <a16:creationId xmlns:a16="http://schemas.microsoft.com/office/drawing/2014/main" id="{E02ED56A-7796-9A70-3D8E-7E22D5A4B10B}"/>
+                <a16:creationId xmlns:a16="http://schemas.microsoft.com/office/drawing/2014/main" id="{54BC9E0A-2D3F-8A04-63B8-FB682D1E3024}"/>
               </a:ext>
             </a:extLst>
           </p:cNvPr>
@@ -5599,7 +5661,7 @@
     </p:spTree>
     <p:extLst>
       <p:ext uri="{BB962C8B-B14F-4D97-AF65-F5344CB8AC3E}">
-        <p14:creationId xmlns:p14="http://schemas.microsoft.com/office/powerpoint/2010/main" val="1102458215"/>
+        <p14:creationId xmlns:p14="http://schemas.microsoft.com/office/powerpoint/2010/main" val="2979457937"/>
       </p:ext>
     </p:extLst>
   </p:cSld>

--- a/public/videos/repositories/cross-genre/cross-genre-tech-preview.pptx
+++ b/public/videos/repositories/cross-genre/cross-genre-tech-preview.pptx
@@ -134,7 +134,7 @@
           <p:cNvPr id="2" name="タイトル 1">
             <a:extLst>
               <a:ext uri="{FF2B5EF4-FFF2-40B4-BE49-F238E27FC236}">
-                <a16:creationId xmlns:a16="http://schemas.microsoft.com/office/drawing/2014/main" id="{E20F5DF9-2C61-AF98-A3B9-FA34188FB22A}"/>
+                <a16:creationId xmlns:a16="http://schemas.microsoft.com/office/drawing/2014/main" id="{8A852F88-50B8-CFED-84E6-56428A1F16A5}"/>
               </a:ext>
             </a:extLst>
           </p:cNvPr>
@@ -171,7 +171,7 @@
           <p:cNvPr id="3" name="字幕 2">
             <a:extLst>
               <a:ext uri="{FF2B5EF4-FFF2-40B4-BE49-F238E27FC236}">
-                <a16:creationId xmlns:a16="http://schemas.microsoft.com/office/drawing/2014/main" id="{5F8E16FC-FE15-A602-1637-0C4BC4146BD7}"/>
+                <a16:creationId xmlns:a16="http://schemas.microsoft.com/office/drawing/2014/main" id="{B4F95879-C2F5-0117-665F-243A969BC378}"/>
               </a:ext>
             </a:extLst>
           </p:cNvPr>
@@ -241,7 +241,7 @@
           <p:cNvPr id="4" name="日付プレースホルダー 3">
             <a:extLst>
               <a:ext uri="{FF2B5EF4-FFF2-40B4-BE49-F238E27FC236}">
-                <a16:creationId xmlns:a16="http://schemas.microsoft.com/office/drawing/2014/main" id="{1B8B97D1-BB9F-B74A-3595-C2AC9934F1AF}"/>
+                <a16:creationId xmlns:a16="http://schemas.microsoft.com/office/drawing/2014/main" id="{A9E627FA-ADE1-1E1A-6F90-E067C9DEAE73}"/>
               </a:ext>
             </a:extLst>
           </p:cNvPr>
@@ -257,7 +257,7 @@
           <a:bodyPr/>
           <a:lstStyle/>
           <a:p>
-            <a:fld id="{A6D1368F-A992-4EC9-B115-511A7DEB4DC6}" type="datetimeFigureOut">
+            <a:fld id="{05B0D58A-7C31-42A2-8BEE-98E5FCB6F152}" type="datetimeFigureOut">
               <a:rPr kumimoji="1" lang="ja-JP" altLang="en-US" smtClean="0"/>
               <a:t>2026/7/30</a:t>
             </a:fld>
@@ -270,7 +270,7 @@
           <p:cNvPr id="5" name="フッター プレースホルダー 4">
             <a:extLst>
               <a:ext uri="{FF2B5EF4-FFF2-40B4-BE49-F238E27FC236}">
-                <a16:creationId xmlns:a16="http://schemas.microsoft.com/office/drawing/2014/main" id="{4A01A40D-45B1-457B-1603-F845838ABD85}"/>
+                <a16:creationId xmlns:a16="http://schemas.microsoft.com/office/drawing/2014/main" id="{F3304121-C555-A9D1-4323-DE65EBC1B5B0}"/>
               </a:ext>
             </a:extLst>
           </p:cNvPr>
@@ -295,7 +295,7 @@
           <p:cNvPr id="6" name="スライド番号プレースホルダー 5">
             <a:extLst>
               <a:ext uri="{FF2B5EF4-FFF2-40B4-BE49-F238E27FC236}">
-                <a16:creationId xmlns:a16="http://schemas.microsoft.com/office/drawing/2014/main" id="{E3B76A05-3C26-8750-2080-CD85ACAEA5C1}"/>
+                <a16:creationId xmlns:a16="http://schemas.microsoft.com/office/drawing/2014/main" id="{55651E36-8EDA-4866-819E-942842D62619}"/>
               </a:ext>
             </a:extLst>
           </p:cNvPr>
@@ -311,7 +311,7 @@
           <a:bodyPr/>
           <a:lstStyle/>
           <a:p>
-            <a:fld id="{94860267-42AB-4F84-B253-BA3B6EFBB2FE}" type="slidenum">
+            <a:fld id="{DA9A9C00-7348-481F-BA02-69C43FCA64BB}" type="slidenum">
               <a:rPr kumimoji="1" lang="ja-JP" altLang="en-US" smtClean="0"/>
               <a:t>‹#›</a:t>
             </a:fld>
@@ -322,7 +322,7 @@
     </p:spTree>
     <p:extLst>
       <p:ext uri="{BB962C8B-B14F-4D97-AF65-F5344CB8AC3E}">
-        <p14:creationId xmlns:p14="http://schemas.microsoft.com/office/powerpoint/2010/main" val="1786846226"/>
+        <p14:creationId xmlns:p14="http://schemas.microsoft.com/office/powerpoint/2010/main" val="237134518"/>
       </p:ext>
     </p:extLst>
   </p:cSld>
@@ -354,7 +354,7 @@
           <p:cNvPr id="2" name="タイトル 1">
             <a:extLst>
               <a:ext uri="{FF2B5EF4-FFF2-40B4-BE49-F238E27FC236}">
-                <a16:creationId xmlns:a16="http://schemas.microsoft.com/office/drawing/2014/main" id="{2CF2B250-636B-74CF-B8C3-35239C0B5D33}"/>
+                <a16:creationId xmlns:a16="http://schemas.microsoft.com/office/drawing/2014/main" id="{B03AA643-DAA1-853F-C6A5-17F94CAFAAF4}"/>
               </a:ext>
             </a:extLst>
           </p:cNvPr>
@@ -382,7 +382,7 @@
           <p:cNvPr id="3" name="縦書きテキスト プレースホルダー 2">
             <a:extLst>
               <a:ext uri="{FF2B5EF4-FFF2-40B4-BE49-F238E27FC236}">
-                <a16:creationId xmlns:a16="http://schemas.microsoft.com/office/drawing/2014/main" id="{42A635ED-A698-772F-889A-37E38F6390B2}"/>
+                <a16:creationId xmlns:a16="http://schemas.microsoft.com/office/drawing/2014/main" id="{B1B7011C-E3CE-AA99-2F8D-AE029FC88D12}"/>
               </a:ext>
             </a:extLst>
           </p:cNvPr>
@@ -471,7 +471,7 @@
           <p:cNvPr id="4" name="日付プレースホルダー 3">
             <a:extLst>
               <a:ext uri="{FF2B5EF4-FFF2-40B4-BE49-F238E27FC236}">
-                <a16:creationId xmlns:a16="http://schemas.microsoft.com/office/drawing/2014/main" id="{CB37FE9F-E65B-AA39-C57A-6DCE245AC2E2}"/>
+                <a16:creationId xmlns:a16="http://schemas.microsoft.com/office/drawing/2014/main" id="{C42254A9-822E-3610-7C4C-9DC6FF2DB86E}"/>
               </a:ext>
             </a:extLst>
           </p:cNvPr>
@@ -487,7 +487,7 @@
           <a:bodyPr/>
           <a:lstStyle/>
           <a:p>
-            <a:fld id="{A6D1368F-A992-4EC9-B115-511A7DEB4DC6}" type="datetimeFigureOut">
+            <a:fld id="{05B0D58A-7C31-42A2-8BEE-98E5FCB6F152}" type="datetimeFigureOut">
               <a:rPr kumimoji="1" lang="ja-JP" altLang="en-US" smtClean="0"/>
               <a:t>2026/7/30</a:t>
             </a:fld>
@@ -500,7 +500,7 @@
           <p:cNvPr id="5" name="フッター プレースホルダー 4">
             <a:extLst>
               <a:ext uri="{FF2B5EF4-FFF2-40B4-BE49-F238E27FC236}">
-                <a16:creationId xmlns:a16="http://schemas.microsoft.com/office/drawing/2014/main" id="{F646E921-2DB9-FA6E-58F5-16AA77BA4EBB}"/>
+                <a16:creationId xmlns:a16="http://schemas.microsoft.com/office/drawing/2014/main" id="{F93F2D21-64E0-421E-9816-A4E73858E159}"/>
               </a:ext>
             </a:extLst>
           </p:cNvPr>
@@ -525,7 +525,7 @@
           <p:cNvPr id="6" name="スライド番号プレースホルダー 5">
             <a:extLst>
               <a:ext uri="{FF2B5EF4-FFF2-40B4-BE49-F238E27FC236}">
-                <a16:creationId xmlns:a16="http://schemas.microsoft.com/office/drawing/2014/main" id="{29154422-7522-2A03-F297-C96CD87511EA}"/>
+                <a16:creationId xmlns:a16="http://schemas.microsoft.com/office/drawing/2014/main" id="{AF8964E3-C2DE-7246-CBE7-6640CF12ECBA}"/>
               </a:ext>
             </a:extLst>
           </p:cNvPr>
@@ -541,7 +541,7 @@
           <a:bodyPr/>
           <a:lstStyle/>
           <a:p>
-            <a:fld id="{94860267-42AB-4F84-B253-BA3B6EFBB2FE}" type="slidenum">
+            <a:fld id="{DA9A9C00-7348-481F-BA02-69C43FCA64BB}" type="slidenum">
               <a:rPr kumimoji="1" lang="ja-JP" altLang="en-US" smtClean="0"/>
               <a:t>‹#›</a:t>
             </a:fld>
@@ -552,7 +552,7 @@
     </p:spTree>
     <p:extLst>
       <p:ext uri="{BB962C8B-B14F-4D97-AF65-F5344CB8AC3E}">
-        <p14:creationId xmlns:p14="http://schemas.microsoft.com/office/powerpoint/2010/main" val="3548718247"/>
+        <p14:creationId xmlns:p14="http://schemas.microsoft.com/office/powerpoint/2010/main" val="635393400"/>
       </p:ext>
     </p:extLst>
   </p:cSld>
@@ -584,7 +584,7 @@
           <p:cNvPr id="2" name="縦書きタイトル 1">
             <a:extLst>
               <a:ext uri="{FF2B5EF4-FFF2-40B4-BE49-F238E27FC236}">
-                <a16:creationId xmlns:a16="http://schemas.microsoft.com/office/drawing/2014/main" id="{41082DAA-6049-AF9E-86DA-E065A85F84AA}"/>
+                <a16:creationId xmlns:a16="http://schemas.microsoft.com/office/drawing/2014/main" id="{3D169F09-7D23-EF27-B172-9EDA478D689A}"/>
               </a:ext>
             </a:extLst>
           </p:cNvPr>
@@ -617,7 +617,7 @@
           <p:cNvPr id="3" name="縦書きテキスト プレースホルダー 2">
             <a:extLst>
               <a:ext uri="{FF2B5EF4-FFF2-40B4-BE49-F238E27FC236}">
-                <a16:creationId xmlns:a16="http://schemas.microsoft.com/office/drawing/2014/main" id="{9907EC9A-9AF1-EE5B-3A1B-7CCA098561D4}"/>
+                <a16:creationId xmlns:a16="http://schemas.microsoft.com/office/drawing/2014/main" id="{C4D8467E-B6A6-A938-0E68-47B46B671066}"/>
               </a:ext>
             </a:extLst>
           </p:cNvPr>
@@ -711,7 +711,7 @@
           <p:cNvPr id="4" name="日付プレースホルダー 3">
             <a:extLst>
               <a:ext uri="{FF2B5EF4-FFF2-40B4-BE49-F238E27FC236}">
-                <a16:creationId xmlns:a16="http://schemas.microsoft.com/office/drawing/2014/main" id="{862EA5FA-780A-17B7-75B0-761AC3BEF1DF}"/>
+                <a16:creationId xmlns:a16="http://schemas.microsoft.com/office/drawing/2014/main" id="{C53384D8-51CE-743B-08F2-9C26F63BF291}"/>
               </a:ext>
             </a:extLst>
           </p:cNvPr>
@@ -727,7 +727,7 @@
           <a:bodyPr/>
           <a:lstStyle/>
           <a:p>
-            <a:fld id="{A6D1368F-A992-4EC9-B115-511A7DEB4DC6}" type="datetimeFigureOut">
+            <a:fld id="{05B0D58A-7C31-42A2-8BEE-98E5FCB6F152}" type="datetimeFigureOut">
               <a:rPr kumimoji="1" lang="ja-JP" altLang="en-US" smtClean="0"/>
               <a:t>2026/7/30</a:t>
             </a:fld>
@@ -740,7 +740,7 @@
           <p:cNvPr id="5" name="フッター プレースホルダー 4">
             <a:extLst>
               <a:ext uri="{FF2B5EF4-FFF2-40B4-BE49-F238E27FC236}">
-                <a16:creationId xmlns:a16="http://schemas.microsoft.com/office/drawing/2014/main" id="{7F2BBB19-1F26-5374-7B42-BD7497F5DF62}"/>
+                <a16:creationId xmlns:a16="http://schemas.microsoft.com/office/drawing/2014/main" id="{7A06CF8B-BC23-EFF3-9F31-0C01AF7A9FF3}"/>
               </a:ext>
             </a:extLst>
           </p:cNvPr>
@@ -765,7 +765,7 @@
           <p:cNvPr id="6" name="スライド番号プレースホルダー 5">
             <a:extLst>
               <a:ext uri="{FF2B5EF4-FFF2-40B4-BE49-F238E27FC236}">
-                <a16:creationId xmlns:a16="http://schemas.microsoft.com/office/drawing/2014/main" id="{3F4C46B1-4CAD-D1EC-439A-CC8FE91C9BC9}"/>
+                <a16:creationId xmlns:a16="http://schemas.microsoft.com/office/drawing/2014/main" id="{D8500F18-1311-09C3-EAB8-29FAE92125C4}"/>
               </a:ext>
             </a:extLst>
           </p:cNvPr>
@@ -781,7 +781,7 @@
           <a:bodyPr/>
           <a:lstStyle/>
           <a:p>
-            <a:fld id="{94860267-42AB-4F84-B253-BA3B6EFBB2FE}" type="slidenum">
+            <a:fld id="{DA9A9C00-7348-481F-BA02-69C43FCA64BB}" type="slidenum">
               <a:rPr kumimoji="1" lang="ja-JP" altLang="en-US" smtClean="0"/>
               <a:t>‹#›</a:t>
             </a:fld>
@@ -792,7 +792,7 @@
     </p:spTree>
     <p:extLst>
       <p:ext uri="{BB962C8B-B14F-4D97-AF65-F5344CB8AC3E}">
-        <p14:creationId xmlns:p14="http://schemas.microsoft.com/office/powerpoint/2010/main" val="3626512088"/>
+        <p14:creationId xmlns:p14="http://schemas.microsoft.com/office/powerpoint/2010/main" val="2163354072"/>
       </p:ext>
     </p:extLst>
   </p:cSld>
@@ -824,7 +824,7 @@
           <p:cNvPr id="2" name="タイトル 1">
             <a:extLst>
               <a:ext uri="{FF2B5EF4-FFF2-40B4-BE49-F238E27FC236}">
-                <a16:creationId xmlns:a16="http://schemas.microsoft.com/office/drawing/2014/main" id="{4B5B7AE5-199A-7E7C-9C8F-D34A722E31B0}"/>
+                <a16:creationId xmlns:a16="http://schemas.microsoft.com/office/drawing/2014/main" id="{2C192B67-6A93-A779-A5BE-0BEB0E475D07}"/>
               </a:ext>
             </a:extLst>
           </p:cNvPr>
@@ -852,7 +852,7 @@
           <p:cNvPr id="3" name="コンテンツ プレースホルダー 2">
             <a:extLst>
               <a:ext uri="{FF2B5EF4-FFF2-40B4-BE49-F238E27FC236}">
-                <a16:creationId xmlns:a16="http://schemas.microsoft.com/office/drawing/2014/main" id="{014A0039-AAD3-CB23-7A80-8A7DCC0A59F0}"/>
+                <a16:creationId xmlns:a16="http://schemas.microsoft.com/office/drawing/2014/main" id="{2008DCCB-6ABA-82B0-28F0-FBEBECAAC545}"/>
               </a:ext>
             </a:extLst>
           </p:cNvPr>
@@ -941,7 +941,7 @@
           <p:cNvPr id="4" name="日付プレースホルダー 3">
             <a:extLst>
               <a:ext uri="{FF2B5EF4-FFF2-40B4-BE49-F238E27FC236}">
-                <a16:creationId xmlns:a16="http://schemas.microsoft.com/office/drawing/2014/main" id="{C8973114-9FF1-04A4-50A7-FD1F59D2A5AD}"/>
+                <a16:creationId xmlns:a16="http://schemas.microsoft.com/office/drawing/2014/main" id="{725A78DE-0A2B-70A2-D23A-C8452627E3B5}"/>
               </a:ext>
             </a:extLst>
           </p:cNvPr>
@@ -957,7 +957,7 @@
           <a:bodyPr/>
           <a:lstStyle/>
           <a:p>
-            <a:fld id="{A6D1368F-A992-4EC9-B115-511A7DEB4DC6}" type="datetimeFigureOut">
+            <a:fld id="{05B0D58A-7C31-42A2-8BEE-98E5FCB6F152}" type="datetimeFigureOut">
               <a:rPr kumimoji="1" lang="ja-JP" altLang="en-US" smtClean="0"/>
               <a:t>2026/7/30</a:t>
             </a:fld>
@@ -970,7 +970,7 @@
           <p:cNvPr id="5" name="フッター プレースホルダー 4">
             <a:extLst>
               <a:ext uri="{FF2B5EF4-FFF2-40B4-BE49-F238E27FC236}">
-                <a16:creationId xmlns:a16="http://schemas.microsoft.com/office/drawing/2014/main" id="{5968D9C3-9B33-3264-81DF-5BD99A88BA8B}"/>
+                <a16:creationId xmlns:a16="http://schemas.microsoft.com/office/drawing/2014/main" id="{626DA952-BFCF-C827-7D5F-0E8398947952}"/>
               </a:ext>
             </a:extLst>
           </p:cNvPr>
@@ -995,7 +995,7 @@
           <p:cNvPr id="6" name="スライド番号プレースホルダー 5">
             <a:extLst>
               <a:ext uri="{FF2B5EF4-FFF2-40B4-BE49-F238E27FC236}">
-                <a16:creationId xmlns:a16="http://schemas.microsoft.com/office/drawing/2014/main" id="{65CBD4C4-31A2-CE86-BFFF-0BDD66846350}"/>
+                <a16:creationId xmlns:a16="http://schemas.microsoft.com/office/drawing/2014/main" id="{2862AF16-2CCC-E6C4-60BD-BA9FCB1CC401}"/>
               </a:ext>
             </a:extLst>
           </p:cNvPr>
@@ -1011,7 +1011,7 @@
           <a:bodyPr/>
           <a:lstStyle/>
           <a:p>
-            <a:fld id="{94860267-42AB-4F84-B253-BA3B6EFBB2FE}" type="slidenum">
+            <a:fld id="{DA9A9C00-7348-481F-BA02-69C43FCA64BB}" type="slidenum">
               <a:rPr kumimoji="1" lang="ja-JP" altLang="en-US" smtClean="0"/>
               <a:t>‹#›</a:t>
             </a:fld>
@@ -1022,7 +1022,7 @@
     </p:spTree>
     <p:extLst>
       <p:ext uri="{BB962C8B-B14F-4D97-AF65-F5344CB8AC3E}">
-        <p14:creationId xmlns:p14="http://schemas.microsoft.com/office/powerpoint/2010/main" val="1109765110"/>
+        <p14:creationId xmlns:p14="http://schemas.microsoft.com/office/powerpoint/2010/main" val="4024732026"/>
       </p:ext>
     </p:extLst>
   </p:cSld>
@@ -1054,7 +1054,7 @@
           <p:cNvPr id="2" name="タイトル 1">
             <a:extLst>
               <a:ext uri="{FF2B5EF4-FFF2-40B4-BE49-F238E27FC236}">
-                <a16:creationId xmlns:a16="http://schemas.microsoft.com/office/drawing/2014/main" id="{A16950B5-D702-6834-A70C-D91B4CCB2208}"/>
+                <a16:creationId xmlns:a16="http://schemas.microsoft.com/office/drawing/2014/main" id="{C483DBE7-252F-0B42-BD50-905832DB3DB6}"/>
               </a:ext>
             </a:extLst>
           </p:cNvPr>
@@ -1091,7 +1091,7 @@
           <p:cNvPr id="3" name="テキスト プレースホルダー 2">
             <a:extLst>
               <a:ext uri="{FF2B5EF4-FFF2-40B4-BE49-F238E27FC236}">
-                <a16:creationId xmlns:a16="http://schemas.microsoft.com/office/drawing/2014/main" id="{4E6E6441-4C13-BFBA-1232-0BED599BFADF}"/>
+                <a16:creationId xmlns:a16="http://schemas.microsoft.com/office/drawing/2014/main" id="{9D4B66DC-15AF-36E4-F4BC-3025CEBB1ECB}"/>
               </a:ext>
             </a:extLst>
           </p:cNvPr>
@@ -1216,7 +1216,7 @@
           <p:cNvPr id="4" name="日付プレースホルダー 3">
             <a:extLst>
               <a:ext uri="{FF2B5EF4-FFF2-40B4-BE49-F238E27FC236}">
-                <a16:creationId xmlns:a16="http://schemas.microsoft.com/office/drawing/2014/main" id="{F6E39DF1-3DBD-C412-8D7F-E9447D87DF67}"/>
+                <a16:creationId xmlns:a16="http://schemas.microsoft.com/office/drawing/2014/main" id="{C3EEA15E-AD2B-C801-3B36-26EF733D6702}"/>
               </a:ext>
             </a:extLst>
           </p:cNvPr>
@@ -1232,7 +1232,7 @@
           <a:bodyPr/>
           <a:lstStyle/>
           <a:p>
-            <a:fld id="{A6D1368F-A992-4EC9-B115-511A7DEB4DC6}" type="datetimeFigureOut">
+            <a:fld id="{05B0D58A-7C31-42A2-8BEE-98E5FCB6F152}" type="datetimeFigureOut">
               <a:rPr kumimoji="1" lang="ja-JP" altLang="en-US" smtClean="0"/>
               <a:t>2026/7/30</a:t>
             </a:fld>
@@ -1245,7 +1245,7 @@
           <p:cNvPr id="5" name="フッター プレースホルダー 4">
             <a:extLst>
               <a:ext uri="{FF2B5EF4-FFF2-40B4-BE49-F238E27FC236}">
-                <a16:creationId xmlns:a16="http://schemas.microsoft.com/office/drawing/2014/main" id="{E03AC652-7C66-2C70-105F-1BB6F223417D}"/>
+                <a16:creationId xmlns:a16="http://schemas.microsoft.com/office/drawing/2014/main" id="{81AFB9CB-2996-B869-C8F1-516F27D4BC5C}"/>
               </a:ext>
             </a:extLst>
           </p:cNvPr>
@@ -1270,7 +1270,7 @@
           <p:cNvPr id="6" name="スライド番号プレースホルダー 5">
             <a:extLst>
               <a:ext uri="{FF2B5EF4-FFF2-40B4-BE49-F238E27FC236}">
-                <a16:creationId xmlns:a16="http://schemas.microsoft.com/office/drawing/2014/main" id="{823DD884-DA71-D556-BFBD-AFD639F448A2}"/>
+                <a16:creationId xmlns:a16="http://schemas.microsoft.com/office/drawing/2014/main" id="{3277291B-A406-1654-689A-2658C596F1EF}"/>
               </a:ext>
             </a:extLst>
           </p:cNvPr>
@@ -1286,7 +1286,7 @@
           <a:bodyPr/>
           <a:lstStyle/>
           <a:p>
-            <a:fld id="{94860267-42AB-4F84-B253-BA3B6EFBB2FE}" type="slidenum">
+            <a:fld id="{DA9A9C00-7348-481F-BA02-69C43FCA64BB}" type="slidenum">
               <a:rPr kumimoji="1" lang="ja-JP" altLang="en-US" smtClean="0"/>
               <a:t>‹#›</a:t>
             </a:fld>
@@ -1297,7 +1297,7 @@
     </p:spTree>
     <p:extLst>
       <p:ext uri="{BB962C8B-B14F-4D97-AF65-F5344CB8AC3E}">
-        <p14:creationId xmlns:p14="http://schemas.microsoft.com/office/powerpoint/2010/main" val="4080733846"/>
+        <p14:creationId xmlns:p14="http://schemas.microsoft.com/office/powerpoint/2010/main" val="4080543279"/>
       </p:ext>
     </p:extLst>
   </p:cSld>
@@ -1329,7 +1329,7 @@
           <p:cNvPr id="2" name="タイトル 1">
             <a:extLst>
               <a:ext uri="{FF2B5EF4-FFF2-40B4-BE49-F238E27FC236}">
-                <a16:creationId xmlns:a16="http://schemas.microsoft.com/office/drawing/2014/main" id="{2AEFBFE2-DDEA-A246-B801-F8C742125413}"/>
+                <a16:creationId xmlns:a16="http://schemas.microsoft.com/office/drawing/2014/main" id="{D661623B-BD27-269F-C0FE-4C7859CB398E}"/>
               </a:ext>
             </a:extLst>
           </p:cNvPr>
@@ -1357,7 +1357,7 @@
           <p:cNvPr id="3" name="コンテンツ プレースホルダー 2">
             <a:extLst>
               <a:ext uri="{FF2B5EF4-FFF2-40B4-BE49-F238E27FC236}">
-                <a16:creationId xmlns:a16="http://schemas.microsoft.com/office/drawing/2014/main" id="{CEC23231-D284-6AE9-8B9F-D40655747F47}"/>
+                <a16:creationId xmlns:a16="http://schemas.microsoft.com/office/drawing/2014/main" id="{EEE6F4EE-96AB-A53B-DF90-4C3F32D0FC7D}"/>
               </a:ext>
             </a:extLst>
           </p:cNvPr>
@@ -1451,7 +1451,7 @@
           <p:cNvPr id="4" name="コンテンツ プレースホルダー 3">
             <a:extLst>
               <a:ext uri="{FF2B5EF4-FFF2-40B4-BE49-F238E27FC236}">
-                <a16:creationId xmlns:a16="http://schemas.microsoft.com/office/drawing/2014/main" id="{E432A67E-DD5F-00B1-8308-A4610CA4B8C2}"/>
+                <a16:creationId xmlns:a16="http://schemas.microsoft.com/office/drawing/2014/main" id="{1664F1B0-6779-8193-9122-010317726976}"/>
               </a:ext>
             </a:extLst>
           </p:cNvPr>
@@ -1545,7 +1545,7 @@
           <p:cNvPr id="5" name="日付プレースホルダー 4">
             <a:extLst>
               <a:ext uri="{FF2B5EF4-FFF2-40B4-BE49-F238E27FC236}">
-                <a16:creationId xmlns:a16="http://schemas.microsoft.com/office/drawing/2014/main" id="{011189E1-17B5-6E9E-7F1E-0FC47EDE8AB4}"/>
+                <a16:creationId xmlns:a16="http://schemas.microsoft.com/office/drawing/2014/main" id="{0690ABEC-704C-B2F5-3853-1D2DB6C0B21A}"/>
               </a:ext>
             </a:extLst>
           </p:cNvPr>
@@ -1561,7 +1561,7 @@
           <a:bodyPr/>
           <a:lstStyle/>
           <a:p>
-            <a:fld id="{A6D1368F-A992-4EC9-B115-511A7DEB4DC6}" type="datetimeFigureOut">
+            <a:fld id="{05B0D58A-7C31-42A2-8BEE-98E5FCB6F152}" type="datetimeFigureOut">
               <a:rPr kumimoji="1" lang="ja-JP" altLang="en-US" smtClean="0"/>
               <a:t>2026/7/30</a:t>
             </a:fld>
@@ -1574,7 +1574,7 @@
           <p:cNvPr id="6" name="フッター プレースホルダー 5">
             <a:extLst>
               <a:ext uri="{FF2B5EF4-FFF2-40B4-BE49-F238E27FC236}">
-                <a16:creationId xmlns:a16="http://schemas.microsoft.com/office/drawing/2014/main" id="{9ECA3161-518F-2E4A-E182-0BCA595CDB02}"/>
+                <a16:creationId xmlns:a16="http://schemas.microsoft.com/office/drawing/2014/main" id="{2880250F-D6F7-3400-04E8-347405E5D009}"/>
               </a:ext>
             </a:extLst>
           </p:cNvPr>
@@ -1599,7 +1599,7 @@
           <p:cNvPr id="7" name="スライド番号プレースホルダー 6">
             <a:extLst>
               <a:ext uri="{FF2B5EF4-FFF2-40B4-BE49-F238E27FC236}">
-                <a16:creationId xmlns:a16="http://schemas.microsoft.com/office/drawing/2014/main" id="{C333841A-7BD0-C8E6-AB53-75F2495DDA9C}"/>
+                <a16:creationId xmlns:a16="http://schemas.microsoft.com/office/drawing/2014/main" id="{249803C8-1116-6899-63FA-6110496E6E0C}"/>
               </a:ext>
             </a:extLst>
           </p:cNvPr>
@@ -1615,7 +1615,7 @@
           <a:bodyPr/>
           <a:lstStyle/>
           <a:p>
-            <a:fld id="{94860267-42AB-4F84-B253-BA3B6EFBB2FE}" type="slidenum">
+            <a:fld id="{DA9A9C00-7348-481F-BA02-69C43FCA64BB}" type="slidenum">
               <a:rPr kumimoji="1" lang="ja-JP" altLang="en-US" smtClean="0"/>
               <a:t>‹#›</a:t>
             </a:fld>
@@ -1626,7 +1626,7 @@
     </p:spTree>
     <p:extLst>
       <p:ext uri="{BB962C8B-B14F-4D97-AF65-F5344CB8AC3E}">
-        <p14:creationId xmlns:p14="http://schemas.microsoft.com/office/powerpoint/2010/main" val="3357502159"/>
+        <p14:creationId xmlns:p14="http://schemas.microsoft.com/office/powerpoint/2010/main" val="971604113"/>
       </p:ext>
     </p:extLst>
   </p:cSld>
@@ -1658,7 +1658,7 @@
           <p:cNvPr id="2" name="タイトル 1">
             <a:extLst>
               <a:ext uri="{FF2B5EF4-FFF2-40B4-BE49-F238E27FC236}">
-                <a16:creationId xmlns:a16="http://schemas.microsoft.com/office/drawing/2014/main" id="{3E5E2B6C-13AC-D375-DDD0-00E817E9A1CC}"/>
+                <a16:creationId xmlns:a16="http://schemas.microsoft.com/office/drawing/2014/main" id="{8CC3C02A-A582-B0DF-4CD1-6413A8CF32E7}"/>
               </a:ext>
             </a:extLst>
           </p:cNvPr>
@@ -1691,7 +1691,7 @@
           <p:cNvPr id="3" name="テキスト プレースホルダー 2">
             <a:extLst>
               <a:ext uri="{FF2B5EF4-FFF2-40B4-BE49-F238E27FC236}">
-                <a16:creationId xmlns:a16="http://schemas.microsoft.com/office/drawing/2014/main" id="{6DA6E3EA-F3A7-6230-5654-A2F7EDB50250}"/>
+                <a16:creationId xmlns:a16="http://schemas.microsoft.com/office/drawing/2014/main" id="{63F5ABF7-4638-BEB7-242B-AEA5218C7769}"/>
               </a:ext>
             </a:extLst>
           </p:cNvPr>
@@ -1762,7 +1762,7 @@
           <p:cNvPr id="4" name="コンテンツ プレースホルダー 3">
             <a:extLst>
               <a:ext uri="{FF2B5EF4-FFF2-40B4-BE49-F238E27FC236}">
-                <a16:creationId xmlns:a16="http://schemas.microsoft.com/office/drawing/2014/main" id="{C38D997F-39BE-BDD6-FC43-D00206AEFC4D}"/>
+                <a16:creationId xmlns:a16="http://schemas.microsoft.com/office/drawing/2014/main" id="{CB7E28BA-8C16-F96F-A485-DCA6674C87BB}"/>
               </a:ext>
             </a:extLst>
           </p:cNvPr>
@@ -1856,7 +1856,7 @@
           <p:cNvPr id="5" name="テキスト プレースホルダー 4">
             <a:extLst>
               <a:ext uri="{FF2B5EF4-FFF2-40B4-BE49-F238E27FC236}">
-                <a16:creationId xmlns:a16="http://schemas.microsoft.com/office/drawing/2014/main" id="{A92919DC-6234-0F3A-630B-A2DD55B29AD8}"/>
+                <a16:creationId xmlns:a16="http://schemas.microsoft.com/office/drawing/2014/main" id="{B45F3131-EC00-39C5-7B38-EC223E3C5DD0}"/>
               </a:ext>
             </a:extLst>
           </p:cNvPr>
@@ -1927,7 +1927,7 @@
           <p:cNvPr id="6" name="コンテンツ プレースホルダー 5">
             <a:extLst>
               <a:ext uri="{FF2B5EF4-FFF2-40B4-BE49-F238E27FC236}">
-                <a16:creationId xmlns:a16="http://schemas.microsoft.com/office/drawing/2014/main" id="{5D1841CC-7F2A-4C7C-3D74-64D68809B8CC}"/>
+                <a16:creationId xmlns:a16="http://schemas.microsoft.com/office/drawing/2014/main" id="{FE6186EC-9185-B2A8-E808-56CBC55F7299}"/>
               </a:ext>
             </a:extLst>
           </p:cNvPr>
@@ -2021,7 +2021,7 @@
           <p:cNvPr id="7" name="日付プレースホルダー 6">
             <a:extLst>
               <a:ext uri="{FF2B5EF4-FFF2-40B4-BE49-F238E27FC236}">
-                <a16:creationId xmlns:a16="http://schemas.microsoft.com/office/drawing/2014/main" id="{F23BBC71-B81E-64F4-AE6E-8FAEA29F8A07}"/>
+                <a16:creationId xmlns:a16="http://schemas.microsoft.com/office/drawing/2014/main" id="{269737AF-BA60-1917-967E-7EE08DDC90E9}"/>
               </a:ext>
             </a:extLst>
           </p:cNvPr>
@@ -2037,7 +2037,7 @@
           <a:bodyPr/>
           <a:lstStyle/>
           <a:p>
-            <a:fld id="{A6D1368F-A992-4EC9-B115-511A7DEB4DC6}" type="datetimeFigureOut">
+            <a:fld id="{05B0D58A-7C31-42A2-8BEE-98E5FCB6F152}" type="datetimeFigureOut">
               <a:rPr kumimoji="1" lang="ja-JP" altLang="en-US" smtClean="0"/>
               <a:t>2026/7/30</a:t>
             </a:fld>
@@ -2050,7 +2050,7 @@
           <p:cNvPr id="8" name="フッター プレースホルダー 7">
             <a:extLst>
               <a:ext uri="{FF2B5EF4-FFF2-40B4-BE49-F238E27FC236}">
-                <a16:creationId xmlns:a16="http://schemas.microsoft.com/office/drawing/2014/main" id="{911052EE-8851-D6E9-00A8-D05E6FEB31AB}"/>
+                <a16:creationId xmlns:a16="http://schemas.microsoft.com/office/drawing/2014/main" id="{18076E99-639F-9566-B8B0-83B29EDDF696}"/>
               </a:ext>
             </a:extLst>
           </p:cNvPr>
@@ -2075,7 +2075,7 @@
           <p:cNvPr id="9" name="スライド番号プレースホルダー 8">
             <a:extLst>
               <a:ext uri="{FF2B5EF4-FFF2-40B4-BE49-F238E27FC236}">
-                <a16:creationId xmlns:a16="http://schemas.microsoft.com/office/drawing/2014/main" id="{4A12F32F-EF9C-040D-A1A0-1354E4551E0B}"/>
+                <a16:creationId xmlns:a16="http://schemas.microsoft.com/office/drawing/2014/main" id="{4752C43C-5C32-0F8E-2565-2A0132D2AEF5}"/>
               </a:ext>
             </a:extLst>
           </p:cNvPr>
@@ -2091,7 +2091,7 @@
           <a:bodyPr/>
           <a:lstStyle/>
           <a:p>
-            <a:fld id="{94860267-42AB-4F84-B253-BA3B6EFBB2FE}" type="slidenum">
+            <a:fld id="{DA9A9C00-7348-481F-BA02-69C43FCA64BB}" type="slidenum">
               <a:rPr kumimoji="1" lang="ja-JP" altLang="en-US" smtClean="0"/>
               <a:t>‹#›</a:t>
             </a:fld>
@@ -2102,7 +2102,7 @@
     </p:spTree>
     <p:extLst>
       <p:ext uri="{BB962C8B-B14F-4D97-AF65-F5344CB8AC3E}">
-        <p14:creationId xmlns:p14="http://schemas.microsoft.com/office/powerpoint/2010/main" val="113445458"/>
+        <p14:creationId xmlns:p14="http://schemas.microsoft.com/office/powerpoint/2010/main" val="253500359"/>
       </p:ext>
     </p:extLst>
   </p:cSld>
@@ -2134,7 +2134,7 @@
           <p:cNvPr id="2" name="タイトル 1">
             <a:extLst>
               <a:ext uri="{FF2B5EF4-FFF2-40B4-BE49-F238E27FC236}">
-                <a16:creationId xmlns:a16="http://schemas.microsoft.com/office/drawing/2014/main" id="{1BBD62CD-1E55-A869-A94E-3CD4DF33726D}"/>
+                <a16:creationId xmlns:a16="http://schemas.microsoft.com/office/drawing/2014/main" id="{B20323CC-8368-C4BC-5AF7-318C753DA6CF}"/>
               </a:ext>
             </a:extLst>
           </p:cNvPr>
@@ -2162,7 +2162,7 @@
           <p:cNvPr id="3" name="日付プレースホルダー 2">
             <a:extLst>
               <a:ext uri="{FF2B5EF4-FFF2-40B4-BE49-F238E27FC236}">
-                <a16:creationId xmlns:a16="http://schemas.microsoft.com/office/drawing/2014/main" id="{EC30073E-9E82-96A4-F255-E52B31CB6882}"/>
+                <a16:creationId xmlns:a16="http://schemas.microsoft.com/office/drawing/2014/main" id="{8A281A8F-AFD8-583A-569A-5405482746D7}"/>
               </a:ext>
             </a:extLst>
           </p:cNvPr>
@@ -2178,7 +2178,7 @@
           <a:bodyPr/>
           <a:lstStyle/>
           <a:p>
-            <a:fld id="{A6D1368F-A992-4EC9-B115-511A7DEB4DC6}" type="datetimeFigureOut">
+            <a:fld id="{05B0D58A-7C31-42A2-8BEE-98E5FCB6F152}" type="datetimeFigureOut">
               <a:rPr kumimoji="1" lang="ja-JP" altLang="en-US" smtClean="0"/>
               <a:t>2026/7/30</a:t>
             </a:fld>
@@ -2191,7 +2191,7 @@
           <p:cNvPr id="4" name="フッター プレースホルダー 3">
             <a:extLst>
               <a:ext uri="{FF2B5EF4-FFF2-40B4-BE49-F238E27FC236}">
-                <a16:creationId xmlns:a16="http://schemas.microsoft.com/office/drawing/2014/main" id="{53BFA397-5C38-FFC9-24B2-0428AA6D8A83}"/>
+                <a16:creationId xmlns:a16="http://schemas.microsoft.com/office/drawing/2014/main" id="{A72776AC-9D46-801E-F75E-418DA6647AB3}"/>
               </a:ext>
             </a:extLst>
           </p:cNvPr>
@@ -2216,7 +2216,7 @@
           <p:cNvPr id="5" name="スライド番号プレースホルダー 4">
             <a:extLst>
               <a:ext uri="{FF2B5EF4-FFF2-40B4-BE49-F238E27FC236}">
-                <a16:creationId xmlns:a16="http://schemas.microsoft.com/office/drawing/2014/main" id="{FC6EFEF7-6AC7-2D40-519E-5CB593F6005F}"/>
+                <a16:creationId xmlns:a16="http://schemas.microsoft.com/office/drawing/2014/main" id="{2C175E60-E224-1C9B-9174-9459B4488F79}"/>
               </a:ext>
             </a:extLst>
           </p:cNvPr>
@@ -2232,7 +2232,7 @@
           <a:bodyPr/>
           <a:lstStyle/>
           <a:p>
-            <a:fld id="{94860267-42AB-4F84-B253-BA3B6EFBB2FE}" type="slidenum">
+            <a:fld id="{DA9A9C00-7348-481F-BA02-69C43FCA64BB}" type="slidenum">
               <a:rPr kumimoji="1" lang="ja-JP" altLang="en-US" smtClean="0"/>
               <a:t>‹#›</a:t>
             </a:fld>
@@ -2243,7 +2243,7 @@
     </p:spTree>
     <p:extLst>
       <p:ext uri="{BB962C8B-B14F-4D97-AF65-F5344CB8AC3E}">
-        <p14:creationId xmlns:p14="http://schemas.microsoft.com/office/powerpoint/2010/main" val="1889316039"/>
+        <p14:creationId xmlns:p14="http://schemas.microsoft.com/office/powerpoint/2010/main" val="1974207923"/>
       </p:ext>
     </p:extLst>
   </p:cSld>
@@ -2275,7 +2275,7 @@
           <p:cNvPr id="2" name="日付プレースホルダー 1">
             <a:extLst>
               <a:ext uri="{FF2B5EF4-FFF2-40B4-BE49-F238E27FC236}">
-                <a16:creationId xmlns:a16="http://schemas.microsoft.com/office/drawing/2014/main" id="{E147423A-E068-3BC9-345C-4CA5D1BEC3C6}"/>
+                <a16:creationId xmlns:a16="http://schemas.microsoft.com/office/drawing/2014/main" id="{F37C8A9E-5536-803A-5871-F075704C589D}"/>
               </a:ext>
             </a:extLst>
           </p:cNvPr>
@@ -2291,7 +2291,7 @@
           <a:bodyPr/>
           <a:lstStyle/>
           <a:p>
-            <a:fld id="{A6D1368F-A992-4EC9-B115-511A7DEB4DC6}" type="datetimeFigureOut">
+            <a:fld id="{05B0D58A-7C31-42A2-8BEE-98E5FCB6F152}" type="datetimeFigureOut">
               <a:rPr kumimoji="1" lang="ja-JP" altLang="en-US" smtClean="0"/>
               <a:t>2026/7/30</a:t>
             </a:fld>
@@ -2304,7 +2304,7 @@
           <p:cNvPr id="3" name="フッター プレースホルダー 2">
             <a:extLst>
               <a:ext uri="{FF2B5EF4-FFF2-40B4-BE49-F238E27FC236}">
-                <a16:creationId xmlns:a16="http://schemas.microsoft.com/office/drawing/2014/main" id="{C62A0D8C-7FAD-8F57-30A0-9739FDC31985}"/>
+                <a16:creationId xmlns:a16="http://schemas.microsoft.com/office/drawing/2014/main" id="{49CCE65A-C894-E7CF-5E65-DF8AB2EE092D}"/>
               </a:ext>
             </a:extLst>
           </p:cNvPr>
@@ -2329,7 +2329,7 @@
           <p:cNvPr id="4" name="スライド番号プレースホルダー 3">
             <a:extLst>
               <a:ext uri="{FF2B5EF4-FFF2-40B4-BE49-F238E27FC236}">
-                <a16:creationId xmlns:a16="http://schemas.microsoft.com/office/drawing/2014/main" id="{DDA224EE-5649-CB1B-A9DB-41A5E9CE61EB}"/>
+                <a16:creationId xmlns:a16="http://schemas.microsoft.com/office/drawing/2014/main" id="{7F3115D3-2F69-DAC1-283A-95C06EFD6314}"/>
               </a:ext>
             </a:extLst>
           </p:cNvPr>
@@ -2345,7 +2345,7 @@
           <a:bodyPr/>
           <a:lstStyle/>
           <a:p>
-            <a:fld id="{94860267-42AB-4F84-B253-BA3B6EFBB2FE}" type="slidenum">
+            <a:fld id="{DA9A9C00-7348-481F-BA02-69C43FCA64BB}" type="slidenum">
               <a:rPr kumimoji="1" lang="ja-JP" altLang="en-US" smtClean="0"/>
               <a:t>‹#›</a:t>
             </a:fld>
@@ -2356,7 +2356,7 @@
     </p:spTree>
     <p:extLst>
       <p:ext uri="{BB962C8B-B14F-4D97-AF65-F5344CB8AC3E}">
-        <p14:creationId xmlns:p14="http://schemas.microsoft.com/office/powerpoint/2010/main" val="4026337071"/>
+        <p14:creationId xmlns:p14="http://schemas.microsoft.com/office/powerpoint/2010/main" val="2731909783"/>
       </p:ext>
     </p:extLst>
   </p:cSld>
@@ -2388,7 +2388,7 @@
           <p:cNvPr id="2" name="タイトル 1">
             <a:extLst>
               <a:ext uri="{FF2B5EF4-FFF2-40B4-BE49-F238E27FC236}">
-                <a16:creationId xmlns:a16="http://schemas.microsoft.com/office/drawing/2014/main" id="{B635B39A-3F28-4CB8-373B-86C0199956DF}"/>
+                <a16:creationId xmlns:a16="http://schemas.microsoft.com/office/drawing/2014/main" id="{06997ABE-7163-FFCA-8044-89198EEB55CD}"/>
               </a:ext>
             </a:extLst>
           </p:cNvPr>
@@ -2425,7 +2425,7 @@
           <p:cNvPr id="3" name="コンテンツ プレースホルダー 2">
             <a:extLst>
               <a:ext uri="{FF2B5EF4-FFF2-40B4-BE49-F238E27FC236}">
-                <a16:creationId xmlns:a16="http://schemas.microsoft.com/office/drawing/2014/main" id="{0C9193F5-9143-849F-0811-9573F2A5FDF6}"/>
+                <a16:creationId xmlns:a16="http://schemas.microsoft.com/office/drawing/2014/main" id="{D1E1F9D1-A2C9-E486-F87C-8A8055E9E678}"/>
               </a:ext>
             </a:extLst>
           </p:cNvPr>
@@ -2547,7 +2547,7 @@
           <p:cNvPr id="4" name="テキスト プレースホルダー 3">
             <a:extLst>
               <a:ext uri="{FF2B5EF4-FFF2-40B4-BE49-F238E27FC236}">
-                <a16:creationId xmlns:a16="http://schemas.microsoft.com/office/drawing/2014/main" id="{4DADCEAD-8D55-F4DB-35C7-8B5147D9477E}"/>
+                <a16:creationId xmlns:a16="http://schemas.microsoft.com/office/drawing/2014/main" id="{47ADC648-1E16-4E38-71CC-D74C28C97E93}"/>
               </a:ext>
             </a:extLst>
           </p:cNvPr>
@@ -2618,7 +2618,7 @@
           <p:cNvPr id="5" name="日付プレースホルダー 4">
             <a:extLst>
               <a:ext uri="{FF2B5EF4-FFF2-40B4-BE49-F238E27FC236}">
-                <a16:creationId xmlns:a16="http://schemas.microsoft.com/office/drawing/2014/main" id="{74AE2519-3AF1-7589-C5D7-021E917B4A7E}"/>
+                <a16:creationId xmlns:a16="http://schemas.microsoft.com/office/drawing/2014/main" id="{8F36A0B6-2216-14B7-509C-50FEE17E9805}"/>
               </a:ext>
             </a:extLst>
           </p:cNvPr>
@@ -2634,7 +2634,7 @@
           <a:bodyPr/>
           <a:lstStyle/>
           <a:p>
-            <a:fld id="{A6D1368F-A992-4EC9-B115-511A7DEB4DC6}" type="datetimeFigureOut">
+            <a:fld id="{05B0D58A-7C31-42A2-8BEE-98E5FCB6F152}" type="datetimeFigureOut">
               <a:rPr kumimoji="1" lang="ja-JP" altLang="en-US" smtClean="0"/>
               <a:t>2026/7/30</a:t>
             </a:fld>
@@ -2647,7 +2647,7 @@
           <p:cNvPr id="6" name="フッター プレースホルダー 5">
             <a:extLst>
               <a:ext uri="{FF2B5EF4-FFF2-40B4-BE49-F238E27FC236}">
-                <a16:creationId xmlns:a16="http://schemas.microsoft.com/office/drawing/2014/main" id="{F0600607-F582-DEE9-D38F-846487B4F8F0}"/>
+                <a16:creationId xmlns:a16="http://schemas.microsoft.com/office/drawing/2014/main" id="{327C50E9-FA64-2343-8D69-866A847C5CE3}"/>
               </a:ext>
             </a:extLst>
           </p:cNvPr>
@@ -2672,7 +2672,7 @@
           <p:cNvPr id="7" name="スライド番号プレースホルダー 6">
             <a:extLst>
               <a:ext uri="{FF2B5EF4-FFF2-40B4-BE49-F238E27FC236}">
-                <a16:creationId xmlns:a16="http://schemas.microsoft.com/office/drawing/2014/main" id="{87BC4B5A-A523-5BDD-8753-F022FAFAF84D}"/>
+                <a16:creationId xmlns:a16="http://schemas.microsoft.com/office/drawing/2014/main" id="{CF5549A4-D0A0-CAD4-F1C3-8E053A75E2B5}"/>
               </a:ext>
             </a:extLst>
           </p:cNvPr>
@@ -2688,7 +2688,7 @@
           <a:bodyPr/>
           <a:lstStyle/>
           <a:p>
-            <a:fld id="{94860267-42AB-4F84-B253-BA3B6EFBB2FE}" type="slidenum">
+            <a:fld id="{DA9A9C00-7348-481F-BA02-69C43FCA64BB}" type="slidenum">
               <a:rPr kumimoji="1" lang="ja-JP" altLang="en-US" smtClean="0"/>
               <a:t>‹#›</a:t>
             </a:fld>
@@ -2699,7 +2699,7 @@
     </p:spTree>
     <p:extLst>
       <p:ext uri="{BB962C8B-B14F-4D97-AF65-F5344CB8AC3E}">
-        <p14:creationId xmlns:p14="http://schemas.microsoft.com/office/powerpoint/2010/main" val="1948886242"/>
+        <p14:creationId xmlns:p14="http://schemas.microsoft.com/office/powerpoint/2010/main" val="1490455929"/>
       </p:ext>
     </p:extLst>
   </p:cSld>
@@ -2731,7 +2731,7 @@
           <p:cNvPr id="2" name="タイトル 1">
             <a:extLst>
               <a:ext uri="{FF2B5EF4-FFF2-40B4-BE49-F238E27FC236}">
-                <a16:creationId xmlns:a16="http://schemas.microsoft.com/office/drawing/2014/main" id="{FDA8E02B-D9B5-8923-BD58-FC4CF9267EEE}"/>
+                <a16:creationId xmlns:a16="http://schemas.microsoft.com/office/drawing/2014/main" id="{0108D966-1E10-B550-529E-551618F2D9CB}"/>
               </a:ext>
             </a:extLst>
           </p:cNvPr>
@@ -2768,7 +2768,7 @@
           <p:cNvPr id="3" name="図プレースホルダー 2">
             <a:extLst>
               <a:ext uri="{FF2B5EF4-FFF2-40B4-BE49-F238E27FC236}">
-                <a16:creationId xmlns:a16="http://schemas.microsoft.com/office/drawing/2014/main" id="{5B620491-6E92-8BA1-C779-017F96B623D9}"/>
+                <a16:creationId xmlns:a16="http://schemas.microsoft.com/office/drawing/2014/main" id="{8351FCC3-77B0-DBCF-5B45-E4422D7B3029}"/>
               </a:ext>
             </a:extLst>
           </p:cNvPr>
@@ -2835,7 +2835,7 @@
           <p:cNvPr id="4" name="テキスト プレースホルダー 3">
             <a:extLst>
               <a:ext uri="{FF2B5EF4-FFF2-40B4-BE49-F238E27FC236}">
-                <a16:creationId xmlns:a16="http://schemas.microsoft.com/office/drawing/2014/main" id="{8065B388-6B6E-7A85-7356-CC94843B57BE}"/>
+                <a16:creationId xmlns:a16="http://schemas.microsoft.com/office/drawing/2014/main" id="{9415F3CC-72F9-B377-67C7-71EBBA03FE33}"/>
               </a:ext>
             </a:extLst>
           </p:cNvPr>
@@ -2906,7 +2906,7 @@
           <p:cNvPr id="5" name="日付プレースホルダー 4">
             <a:extLst>
               <a:ext uri="{FF2B5EF4-FFF2-40B4-BE49-F238E27FC236}">
-                <a16:creationId xmlns:a16="http://schemas.microsoft.com/office/drawing/2014/main" id="{03DC4103-6A0D-ECEA-30A5-2E2F03961F5F}"/>
+                <a16:creationId xmlns:a16="http://schemas.microsoft.com/office/drawing/2014/main" id="{64631F6A-8DC3-E952-F579-4D9E3372E079}"/>
               </a:ext>
             </a:extLst>
           </p:cNvPr>
@@ -2922,7 +2922,7 @@
           <a:bodyPr/>
           <a:lstStyle/>
           <a:p>
-            <a:fld id="{A6D1368F-A992-4EC9-B115-511A7DEB4DC6}" type="datetimeFigureOut">
+            <a:fld id="{05B0D58A-7C31-42A2-8BEE-98E5FCB6F152}" type="datetimeFigureOut">
               <a:rPr kumimoji="1" lang="ja-JP" altLang="en-US" smtClean="0"/>
               <a:t>2026/7/30</a:t>
             </a:fld>
@@ -2935,7 +2935,7 @@
           <p:cNvPr id="6" name="フッター プレースホルダー 5">
             <a:extLst>
               <a:ext uri="{FF2B5EF4-FFF2-40B4-BE49-F238E27FC236}">
-                <a16:creationId xmlns:a16="http://schemas.microsoft.com/office/drawing/2014/main" id="{FA48CABB-A811-7360-61C1-ED5310DC9AA2}"/>
+                <a16:creationId xmlns:a16="http://schemas.microsoft.com/office/drawing/2014/main" id="{9B91DE5B-87A6-B207-237A-1D430CE7D1B3}"/>
               </a:ext>
             </a:extLst>
           </p:cNvPr>
@@ -2960,7 +2960,7 @@
           <p:cNvPr id="7" name="スライド番号プレースホルダー 6">
             <a:extLst>
               <a:ext uri="{FF2B5EF4-FFF2-40B4-BE49-F238E27FC236}">
-                <a16:creationId xmlns:a16="http://schemas.microsoft.com/office/drawing/2014/main" id="{00B70EC2-0D67-8465-E451-7B51DCFDF07D}"/>
+                <a16:creationId xmlns:a16="http://schemas.microsoft.com/office/drawing/2014/main" id="{D8D4CF18-F05A-9B6A-8FA6-6B87C2A78A17}"/>
               </a:ext>
             </a:extLst>
           </p:cNvPr>
@@ -2976,7 +2976,7 @@
           <a:bodyPr/>
           <a:lstStyle/>
           <a:p>
-            <a:fld id="{94860267-42AB-4F84-B253-BA3B6EFBB2FE}" type="slidenum">
+            <a:fld id="{DA9A9C00-7348-481F-BA02-69C43FCA64BB}" type="slidenum">
               <a:rPr kumimoji="1" lang="ja-JP" altLang="en-US" smtClean="0"/>
               <a:t>‹#›</a:t>
             </a:fld>
@@ -2987,7 +2987,7 @@
     </p:spTree>
     <p:extLst>
       <p:ext uri="{BB962C8B-B14F-4D97-AF65-F5344CB8AC3E}">
-        <p14:creationId xmlns:p14="http://schemas.microsoft.com/office/powerpoint/2010/main" val="1029731396"/>
+        <p14:creationId xmlns:p14="http://schemas.microsoft.com/office/powerpoint/2010/main" val="4091616240"/>
       </p:ext>
     </p:extLst>
   </p:cSld>
@@ -3024,7 +3024,7 @@
           <p:cNvPr id="2" name="タイトル プレースホルダー 1">
             <a:extLst>
               <a:ext uri="{FF2B5EF4-FFF2-40B4-BE49-F238E27FC236}">
-                <a16:creationId xmlns:a16="http://schemas.microsoft.com/office/drawing/2014/main" id="{8B7342D3-F04B-6946-FE9A-A3DAFD3DD9AF}"/>
+                <a16:creationId xmlns:a16="http://schemas.microsoft.com/office/drawing/2014/main" id="{5D02A7B6-1B31-796D-DFBE-A7819FEBBAC6}"/>
               </a:ext>
             </a:extLst>
           </p:cNvPr>
@@ -3062,7 +3062,7 @@
           <p:cNvPr id="3" name="テキスト プレースホルダー 2">
             <a:extLst>
               <a:ext uri="{FF2B5EF4-FFF2-40B4-BE49-F238E27FC236}">
-                <a16:creationId xmlns:a16="http://schemas.microsoft.com/office/drawing/2014/main" id="{76BC9741-FABF-9590-79BF-C5FEA1AAB436}"/>
+                <a16:creationId xmlns:a16="http://schemas.microsoft.com/office/drawing/2014/main" id="{9330C39B-BD33-D936-1268-5CBD35568D12}"/>
               </a:ext>
             </a:extLst>
           </p:cNvPr>
@@ -3161,7 +3161,7 @@
           <p:cNvPr id="4" name="日付プレースホルダー 3">
             <a:extLst>
               <a:ext uri="{FF2B5EF4-FFF2-40B4-BE49-F238E27FC236}">
-                <a16:creationId xmlns:a16="http://schemas.microsoft.com/office/drawing/2014/main" id="{BE61DAEE-A397-7835-4296-846AD7798AC1}"/>
+                <a16:creationId xmlns:a16="http://schemas.microsoft.com/office/drawing/2014/main" id="{840C10B9-4C71-25A0-4ABC-18EEAD1CC9C0}"/>
               </a:ext>
             </a:extLst>
           </p:cNvPr>
@@ -3195,7 +3195,7 @@
             </a:lvl1pPr>
           </a:lstStyle>
           <a:p>
-            <a:fld id="{A6D1368F-A992-4EC9-B115-511A7DEB4DC6}" type="datetimeFigureOut">
+            <a:fld id="{05B0D58A-7C31-42A2-8BEE-98E5FCB6F152}" type="datetimeFigureOut">
               <a:rPr kumimoji="1" lang="ja-JP" altLang="en-US" smtClean="0"/>
               <a:t>2026/7/30</a:t>
             </a:fld>
@@ -3208,7 +3208,7 @@
           <p:cNvPr id="5" name="フッター プレースホルダー 4">
             <a:extLst>
               <a:ext uri="{FF2B5EF4-FFF2-40B4-BE49-F238E27FC236}">
-                <a16:creationId xmlns:a16="http://schemas.microsoft.com/office/drawing/2014/main" id="{781ED74C-5D4C-9858-DC74-6A3DCBE1F46A}"/>
+                <a16:creationId xmlns:a16="http://schemas.microsoft.com/office/drawing/2014/main" id="{87482612-9E62-787A-1BDD-E6E3E9AA13CA}"/>
               </a:ext>
             </a:extLst>
           </p:cNvPr>
@@ -3251,7 +3251,7 @@
           <p:cNvPr id="6" name="スライド番号プレースホルダー 5">
             <a:extLst>
               <a:ext uri="{FF2B5EF4-FFF2-40B4-BE49-F238E27FC236}">
-                <a16:creationId xmlns:a16="http://schemas.microsoft.com/office/drawing/2014/main" id="{9F30B5F8-65F7-0497-4772-98313B74F6D1}"/>
+                <a16:creationId xmlns:a16="http://schemas.microsoft.com/office/drawing/2014/main" id="{AB0EF6A9-0171-EA43-0D4A-C094628FABD3}"/>
               </a:ext>
             </a:extLst>
           </p:cNvPr>
@@ -3285,7 +3285,7 @@
             </a:lvl1pPr>
           </a:lstStyle>
           <a:p>
-            <a:fld id="{94860267-42AB-4F84-B253-BA3B6EFBB2FE}" type="slidenum">
+            <a:fld id="{DA9A9C00-7348-481F-BA02-69C43FCA64BB}" type="slidenum">
               <a:rPr kumimoji="1" lang="ja-JP" altLang="en-US" smtClean="0"/>
               <a:t>‹#›</a:t>
             </a:fld>
@@ -3296,7 +3296,7 @@
     </p:spTree>
     <p:extLst>
       <p:ext uri="{BB962C8B-B14F-4D97-AF65-F5344CB8AC3E}">
-        <p14:creationId xmlns:p14="http://schemas.microsoft.com/office/powerpoint/2010/main" val="2459373964"/>
+        <p14:creationId xmlns:p14="http://schemas.microsoft.com/office/powerpoint/2010/main" val="3460268714"/>
       </p:ext>
     </p:extLst>
   </p:cSld>
@@ -3619,7 +3619,7 @@
           <p:cNvPr id="2" name="テキスト ボックス 1">
             <a:extLst>
               <a:ext uri="{FF2B5EF4-FFF2-40B4-BE49-F238E27FC236}">
-                <a16:creationId xmlns:a16="http://schemas.microsoft.com/office/drawing/2014/main" id="{257E00DA-5AAE-CDFD-8DC0-17306A1176D7}"/>
+                <a16:creationId xmlns:a16="http://schemas.microsoft.com/office/drawing/2014/main" id="{419A688C-F82A-9E3A-2D78-2FED3717C2E3}"/>
               </a:ext>
             </a:extLst>
           </p:cNvPr>
@@ -3665,7 +3665,7 @@
           <p:cNvPr id="3" name="テキスト ボックス 2">
             <a:extLst>
               <a:ext uri="{FF2B5EF4-FFF2-40B4-BE49-F238E27FC236}">
-                <a16:creationId xmlns:a16="http://schemas.microsoft.com/office/drawing/2014/main" id="{B5E9FA56-844E-74DF-D083-0CF97C190B30}"/>
+                <a16:creationId xmlns:a16="http://schemas.microsoft.com/office/drawing/2014/main" id="{879DE6DB-52B7-3911-C81E-EE515DD9C560}"/>
               </a:ext>
             </a:extLst>
           </p:cNvPr>
@@ -3714,7 +3714,7 @@
           <p:cNvPr id="4" name="テキスト ボックス 3">
             <a:extLst>
               <a:ext uri="{FF2B5EF4-FFF2-40B4-BE49-F238E27FC236}">
-                <a16:creationId xmlns:a16="http://schemas.microsoft.com/office/drawing/2014/main" id="{EFC2C99C-D4C5-68F2-9349-BC925AF19491}"/>
+                <a16:creationId xmlns:a16="http://schemas.microsoft.com/office/drawing/2014/main" id="{CF804472-6A2C-AD51-FF26-8E103741E788}"/>
               </a:ext>
             </a:extLst>
           </p:cNvPr>
@@ -3754,7 +3754,7 @@
           <p:cNvPr id="5" name="テキスト ボックス 4">
             <a:extLst>
               <a:ext uri="{FF2B5EF4-FFF2-40B4-BE49-F238E27FC236}">
-                <a16:creationId xmlns:a16="http://schemas.microsoft.com/office/drawing/2014/main" id="{6FF17070-EEA7-18D6-956F-0D75F8C1AF1D}"/>
+                <a16:creationId xmlns:a16="http://schemas.microsoft.com/office/drawing/2014/main" id="{D44DA702-C162-6223-75A3-32A2C79768C6}"/>
               </a:ext>
             </a:extLst>
           </p:cNvPr>
@@ -3801,7 +3801,7 @@
             <a:hlinkClick r:id="" action="ppaction://media"/>
             <a:extLst>
               <a:ext uri="{FF2B5EF4-FFF2-40B4-BE49-F238E27FC236}">
-                <a16:creationId xmlns:a16="http://schemas.microsoft.com/office/drawing/2014/main" id="{50BD3E3D-BD66-E04E-3FAF-A1E40F786991}"/>
+                <a16:creationId xmlns:a16="http://schemas.microsoft.com/office/drawing/2014/main" id="{C3CA67DD-DAC2-0EF9-593A-EA661EDB0D39}"/>
               </a:ext>
             </a:extLst>
           </p:cNvPr>
@@ -3836,7 +3836,7 @@
     </p:spTree>
     <p:extLst>
       <p:ext uri="{BB962C8B-B14F-4D97-AF65-F5344CB8AC3E}">
-        <p14:creationId xmlns:p14="http://schemas.microsoft.com/office/powerpoint/2010/main" val="88112900"/>
+        <p14:creationId xmlns:p14="http://schemas.microsoft.com/office/powerpoint/2010/main" val="3540948881"/>
       </p:ext>
     </p:extLst>
   </p:cSld>
@@ -3960,7 +3960,7 @@
           <p:cNvPr id="2" name="テキスト ボックス 1">
             <a:extLst>
               <a:ext uri="{FF2B5EF4-FFF2-40B4-BE49-F238E27FC236}">
-                <a16:creationId xmlns:a16="http://schemas.microsoft.com/office/drawing/2014/main" id="{E6FA3184-DA98-68D1-E873-2B12C6235FCD}"/>
+                <a16:creationId xmlns:a16="http://schemas.microsoft.com/office/drawing/2014/main" id="{CD2D453C-CF84-9C70-32DA-D4D9D51E5938}"/>
               </a:ext>
             </a:extLst>
           </p:cNvPr>
@@ -4006,7 +4006,7 @@
           <p:cNvPr id="3" name="テキスト ボックス 2">
             <a:extLst>
               <a:ext uri="{FF2B5EF4-FFF2-40B4-BE49-F238E27FC236}">
-                <a16:creationId xmlns:a16="http://schemas.microsoft.com/office/drawing/2014/main" id="{5BC65C58-950F-2899-FDE8-316FBA2DD4D9}"/>
+                <a16:creationId xmlns:a16="http://schemas.microsoft.com/office/drawing/2014/main" id="{47324CD8-CE48-FA24-A78B-92DDA63F4B5E}"/>
               </a:ext>
             </a:extLst>
           </p:cNvPr>
@@ -4046,7 +4046,7 @@
           <p:cNvPr id="4" name="テキスト ボックス 3">
             <a:extLst>
               <a:ext uri="{FF2B5EF4-FFF2-40B4-BE49-F238E27FC236}">
-                <a16:creationId xmlns:a16="http://schemas.microsoft.com/office/drawing/2014/main" id="{7D7DE548-528D-CBE1-7C30-D857C7958175}"/>
+                <a16:creationId xmlns:a16="http://schemas.microsoft.com/office/drawing/2014/main" id="{F9171A29-1B21-97F9-BFF6-BDBFCC3F7B0F}"/>
               </a:ext>
             </a:extLst>
           </p:cNvPr>
@@ -4095,7 +4095,7 @@
           <p:cNvPr id="5" name="テキスト ボックス 4">
             <a:extLst>
               <a:ext uri="{FF2B5EF4-FFF2-40B4-BE49-F238E27FC236}">
-                <a16:creationId xmlns:a16="http://schemas.microsoft.com/office/drawing/2014/main" id="{1EE35C30-67A5-48E2-7648-C1DE848F84C2}"/>
+                <a16:creationId xmlns:a16="http://schemas.microsoft.com/office/drawing/2014/main" id="{7E47FB78-10AF-4E4F-1CE8-2B08AFAB77FA}"/>
               </a:ext>
             </a:extLst>
           </p:cNvPr>
@@ -4142,7 +4142,7 @@
             <a:hlinkClick r:id="" action="ppaction://media"/>
             <a:extLst>
               <a:ext uri="{FF2B5EF4-FFF2-40B4-BE49-F238E27FC236}">
-                <a16:creationId xmlns:a16="http://schemas.microsoft.com/office/drawing/2014/main" id="{2D77532B-74A2-5C35-D35C-00BD43138291}"/>
+                <a16:creationId xmlns:a16="http://schemas.microsoft.com/office/drawing/2014/main" id="{E4CB125D-31A0-879E-0C59-94164F862AE9}"/>
               </a:ext>
             </a:extLst>
           </p:cNvPr>
@@ -4177,7 +4177,7 @@
     </p:spTree>
     <p:extLst>
       <p:ext uri="{BB962C8B-B14F-4D97-AF65-F5344CB8AC3E}">
-        <p14:creationId xmlns:p14="http://schemas.microsoft.com/office/powerpoint/2010/main" val="727593577"/>
+        <p14:creationId xmlns:p14="http://schemas.microsoft.com/office/powerpoint/2010/main" val="699097637"/>
       </p:ext>
     </p:extLst>
   </p:cSld>
@@ -4301,7 +4301,7 @@
           <p:cNvPr id="2" name="テキスト ボックス 1">
             <a:extLst>
               <a:ext uri="{FF2B5EF4-FFF2-40B4-BE49-F238E27FC236}">
-                <a16:creationId xmlns:a16="http://schemas.microsoft.com/office/drawing/2014/main" id="{E1D4772D-FB84-80DB-2C6B-4ED86C2525E0}"/>
+                <a16:creationId xmlns:a16="http://schemas.microsoft.com/office/drawing/2014/main" id="{83A5A297-FC1F-5AA0-9C39-DE453505D8CA}"/>
               </a:ext>
             </a:extLst>
           </p:cNvPr>
@@ -4347,7 +4347,7 @@
           <p:cNvPr id="3" name="テキスト ボックス 2">
             <a:extLst>
               <a:ext uri="{FF2B5EF4-FFF2-40B4-BE49-F238E27FC236}">
-                <a16:creationId xmlns:a16="http://schemas.microsoft.com/office/drawing/2014/main" id="{42830936-8263-4DB5-CAAE-1B63B8753FE1}"/>
+                <a16:creationId xmlns:a16="http://schemas.microsoft.com/office/drawing/2014/main" id="{F3E0E051-1006-DBEC-1F0C-7C3D37DBB2CD}"/>
               </a:ext>
             </a:extLst>
           </p:cNvPr>
@@ -4387,7 +4387,7 @@
           <p:cNvPr id="4" name="テキスト ボックス 3">
             <a:extLst>
               <a:ext uri="{FF2B5EF4-FFF2-40B4-BE49-F238E27FC236}">
-                <a16:creationId xmlns:a16="http://schemas.microsoft.com/office/drawing/2014/main" id="{0FF6EBBB-2568-F315-BB37-97D85538DB1B}"/>
+                <a16:creationId xmlns:a16="http://schemas.microsoft.com/office/drawing/2014/main" id="{37B5FC6B-D1FD-8F00-48D2-3A7006D08E3D}"/>
               </a:ext>
             </a:extLst>
           </p:cNvPr>
@@ -4482,7 +4482,7 @@
           <p:cNvPr id="5" name="テキスト ボックス 4">
             <a:extLst>
               <a:ext uri="{FF2B5EF4-FFF2-40B4-BE49-F238E27FC236}">
-                <a16:creationId xmlns:a16="http://schemas.microsoft.com/office/drawing/2014/main" id="{7E1B7494-1BA2-0B9D-31A4-CB1C8422B67D}"/>
+                <a16:creationId xmlns:a16="http://schemas.microsoft.com/office/drawing/2014/main" id="{6CE1457C-5804-44DC-BD6F-A8D1FDE66FA3}"/>
               </a:ext>
             </a:extLst>
           </p:cNvPr>
@@ -4529,7 +4529,7 @@
             <a:hlinkClick r:id="" action="ppaction://media"/>
             <a:extLst>
               <a:ext uri="{FF2B5EF4-FFF2-40B4-BE49-F238E27FC236}">
-                <a16:creationId xmlns:a16="http://schemas.microsoft.com/office/drawing/2014/main" id="{484FC45E-7E4E-56D0-0F17-F4A20255785B}"/>
+                <a16:creationId xmlns:a16="http://schemas.microsoft.com/office/drawing/2014/main" id="{0A8C8641-5D9F-DCE8-F5CF-CD4FF98C6FDD}"/>
               </a:ext>
             </a:extLst>
           </p:cNvPr>
@@ -4564,7 +4564,7 @@
     </p:spTree>
     <p:extLst>
       <p:ext uri="{BB962C8B-B14F-4D97-AF65-F5344CB8AC3E}">
-        <p14:creationId xmlns:p14="http://schemas.microsoft.com/office/powerpoint/2010/main" val="2595384885"/>
+        <p14:creationId xmlns:p14="http://schemas.microsoft.com/office/powerpoint/2010/main" val="424768870"/>
       </p:ext>
     </p:extLst>
   </p:cSld>
@@ -4688,7 +4688,7 @@
           <p:cNvPr id="2" name="テキスト ボックス 1">
             <a:extLst>
               <a:ext uri="{FF2B5EF4-FFF2-40B4-BE49-F238E27FC236}">
-                <a16:creationId xmlns:a16="http://schemas.microsoft.com/office/drawing/2014/main" id="{43EE81CB-CAF2-10F5-8B8A-90929DD9F38D}"/>
+                <a16:creationId xmlns:a16="http://schemas.microsoft.com/office/drawing/2014/main" id="{095F85D7-F153-CE6F-AEA4-065D080330AB}"/>
               </a:ext>
             </a:extLst>
           </p:cNvPr>
@@ -4734,7 +4734,7 @@
           <p:cNvPr id="3" name="テキスト ボックス 2">
             <a:extLst>
               <a:ext uri="{FF2B5EF4-FFF2-40B4-BE49-F238E27FC236}">
-                <a16:creationId xmlns:a16="http://schemas.microsoft.com/office/drawing/2014/main" id="{18853B9B-5E14-4923-0271-CBD829648A01}"/>
+                <a16:creationId xmlns:a16="http://schemas.microsoft.com/office/drawing/2014/main" id="{A7A62940-090B-0B7E-C4AF-2262B2A7C784}"/>
               </a:ext>
             </a:extLst>
           </p:cNvPr>
@@ -4774,7 +4774,7 @@
           <p:cNvPr id="4" name="テキスト ボックス 3">
             <a:extLst>
               <a:ext uri="{FF2B5EF4-FFF2-40B4-BE49-F238E27FC236}">
-                <a16:creationId xmlns:a16="http://schemas.microsoft.com/office/drawing/2014/main" id="{17258FEF-163A-E33D-20E1-ED9CCD49FC94}"/>
+                <a16:creationId xmlns:a16="http://schemas.microsoft.com/office/drawing/2014/main" id="{44C7A180-6069-2364-18B6-0AAFD94999E9}"/>
               </a:ext>
             </a:extLst>
           </p:cNvPr>
@@ -4884,7 +4884,7 @@
           <p:cNvPr id="5" name="テキスト ボックス 4">
             <a:extLst>
               <a:ext uri="{FF2B5EF4-FFF2-40B4-BE49-F238E27FC236}">
-                <a16:creationId xmlns:a16="http://schemas.microsoft.com/office/drawing/2014/main" id="{007BF3BA-191D-9739-7A2E-D07407261567}"/>
+                <a16:creationId xmlns:a16="http://schemas.microsoft.com/office/drawing/2014/main" id="{41C8FA2E-8C15-4003-C5AB-D794811B446D}"/>
               </a:ext>
             </a:extLst>
           </p:cNvPr>
@@ -4931,7 +4931,7 @@
             <a:hlinkClick r:id="" action="ppaction://media"/>
             <a:extLst>
               <a:ext uri="{FF2B5EF4-FFF2-40B4-BE49-F238E27FC236}">
-                <a16:creationId xmlns:a16="http://schemas.microsoft.com/office/drawing/2014/main" id="{3F66481C-7B54-094F-233A-178270B03C35}"/>
+                <a16:creationId xmlns:a16="http://schemas.microsoft.com/office/drawing/2014/main" id="{76143D27-1E4D-45C1-791D-5BE3AC871EB0}"/>
               </a:ext>
             </a:extLst>
           </p:cNvPr>
@@ -4966,7 +4966,7 @@
     </p:spTree>
     <p:extLst>
       <p:ext uri="{BB962C8B-B14F-4D97-AF65-F5344CB8AC3E}">
-        <p14:creationId xmlns:p14="http://schemas.microsoft.com/office/powerpoint/2010/main" val="873554973"/>
+        <p14:creationId xmlns:p14="http://schemas.microsoft.com/office/powerpoint/2010/main" val="2604910873"/>
       </p:ext>
     </p:extLst>
   </p:cSld>
@@ -5090,7 +5090,7 @@
           <p:cNvPr id="2" name="テキスト ボックス 1">
             <a:extLst>
               <a:ext uri="{FF2B5EF4-FFF2-40B4-BE49-F238E27FC236}">
-                <a16:creationId xmlns:a16="http://schemas.microsoft.com/office/drawing/2014/main" id="{5B6A22CA-F4DC-B8E1-7920-16F3A80A8B97}"/>
+                <a16:creationId xmlns:a16="http://schemas.microsoft.com/office/drawing/2014/main" id="{75BAEE91-8374-2772-5968-F40CDC3C02C1}"/>
               </a:ext>
             </a:extLst>
           </p:cNvPr>
@@ -5136,7 +5136,7 @@
           <p:cNvPr id="3" name="テキスト ボックス 2">
             <a:extLst>
               <a:ext uri="{FF2B5EF4-FFF2-40B4-BE49-F238E27FC236}">
-                <a16:creationId xmlns:a16="http://schemas.microsoft.com/office/drawing/2014/main" id="{90BCA456-2AB1-EF28-0500-1AF46E43B980}"/>
+                <a16:creationId xmlns:a16="http://schemas.microsoft.com/office/drawing/2014/main" id="{AE86FCBC-D06B-7C9D-4BEA-8FD38EA6F7FA}"/>
               </a:ext>
             </a:extLst>
           </p:cNvPr>
@@ -5176,7 +5176,7 @@
           <p:cNvPr id="4" name="テキスト ボックス 3">
             <a:extLst>
               <a:ext uri="{FF2B5EF4-FFF2-40B4-BE49-F238E27FC236}">
-                <a16:creationId xmlns:a16="http://schemas.microsoft.com/office/drawing/2014/main" id="{E762AB1D-5D87-6E30-1AD2-50A24660C4B0}"/>
+                <a16:creationId xmlns:a16="http://schemas.microsoft.com/office/drawing/2014/main" id="{F01557B6-BD13-C24D-116C-1FA3D1953F57}"/>
               </a:ext>
             </a:extLst>
           </p:cNvPr>
@@ -5200,20 +5200,14 @@
           <a:lstStyle/>
           <a:p>
             <a:r>
-              <a:rPr kumimoji="1" lang="en-US" altLang="ja-JP" sz="2000">
+              <a:rPr kumimoji="1" lang="ja-JP" altLang="en-US" sz="2000">
                 <a:solidFill>
                   <a:srgbClr val="333333"/>
                 </a:solidFill>
                 <a:latin typeface="Arial" panose="020B0604020202020204" pitchFamily="34" charset="0"/>
               </a:rPr>
-              <a:t>Upgrade Next.js to fix critical security vulnerabilities</a:t>
-            </a:r>
-            <a:endParaRPr kumimoji="1" lang="ja-JP" altLang="en-US" sz="2000">
-              <a:solidFill>
-                <a:srgbClr val="333333"/>
-              </a:solidFill>
-              <a:latin typeface="Arial" panose="020B0604020202020204" pitchFamily="34" charset="0"/>
-            </a:endParaRPr>
+              <a:t>直近のコミットでは、不具合修正と安定性向上が行われました。</a:t>
+            </a:r>
           </a:p>
         </p:txBody>
       </p:sp>
@@ -5222,7 +5216,7 @@
           <p:cNvPr id="5" name="テキスト ボックス 4">
             <a:extLst>
               <a:ext uri="{FF2B5EF4-FFF2-40B4-BE49-F238E27FC236}">
-                <a16:creationId xmlns:a16="http://schemas.microsoft.com/office/drawing/2014/main" id="{3870C9D2-3794-AA89-1998-768B9820B781}"/>
+                <a16:creationId xmlns:a16="http://schemas.microsoft.com/office/drawing/2014/main" id="{B2BB27FF-5E21-D448-2096-F2F8527A2C28}"/>
               </a:ext>
             </a:extLst>
           </p:cNvPr>
@@ -5269,7 +5263,7 @@
             <a:hlinkClick r:id="" action="ppaction://media"/>
             <a:extLst>
               <a:ext uri="{FF2B5EF4-FFF2-40B4-BE49-F238E27FC236}">
-                <a16:creationId xmlns:a16="http://schemas.microsoft.com/office/drawing/2014/main" id="{53CFF85B-034F-CA16-0891-6388BCD29875}"/>
+                <a16:creationId xmlns:a16="http://schemas.microsoft.com/office/drawing/2014/main" id="{A47E744E-411A-BF59-B5B6-5DCDC3740D47}"/>
               </a:ext>
             </a:extLst>
           </p:cNvPr>
@@ -5304,7 +5298,7 @@
     </p:spTree>
     <p:extLst>
       <p:ext uri="{BB962C8B-B14F-4D97-AF65-F5344CB8AC3E}">
-        <p14:creationId xmlns:p14="http://schemas.microsoft.com/office/powerpoint/2010/main" val="250450744"/>
+        <p14:creationId xmlns:p14="http://schemas.microsoft.com/office/powerpoint/2010/main" val="1262988296"/>
       </p:ext>
     </p:extLst>
   </p:cSld>
@@ -5313,10 +5307,10 @@
   </p:clrMapOvr>
   <mc:AlternateContent xmlns:mc="http://schemas.openxmlformats.org/markup-compatibility/2006">
     <mc:Choice xmlns:p14="http://schemas.microsoft.com/office/powerpoint/2010/main" Requires="p14">
-      <p:transition spd="slow" p14:dur="2000" advTm="10000"/>
+      <p:transition spd="slow" p14:dur="2000" advTm="6000"/>
     </mc:Choice>
     <mc:Fallback>
-      <p:transition spd="slow" advTm="10000"/>
+      <p:transition spd="slow" advTm="6000"/>
     </mc:Fallback>
   </mc:AlternateContent>
   <p:timing>
@@ -5347,7 +5341,7 @@
                                   <p:childTnLst>
                                     <p:cmd type="call" cmd="playFrom(0.0)">
                                       <p:cBhvr>
-                                        <p:cTn id="6" dur="9080" fill="hold"/>
+                                        <p:cTn id="6" dur="5771" fill="hold"/>
                                         <p:tgtEl>
                                           <p:spTgt spid="6"/>
                                         </p:tgtEl>
@@ -5428,7 +5422,7 @@
           <p:cNvPr id="2" name="テキスト ボックス 1">
             <a:extLst>
               <a:ext uri="{FF2B5EF4-FFF2-40B4-BE49-F238E27FC236}">
-                <a16:creationId xmlns:a16="http://schemas.microsoft.com/office/drawing/2014/main" id="{2C64EE6F-9874-558D-8FF4-07B8F5F56BD0}"/>
+                <a16:creationId xmlns:a16="http://schemas.microsoft.com/office/drawing/2014/main" id="{CD762BE2-9C7E-EBB4-F592-3376411A07E7}"/>
               </a:ext>
             </a:extLst>
           </p:cNvPr>
@@ -5474,7 +5468,7 @@
           <p:cNvPr id="3" name="テキスト ボックス 2">
             <a:extLst>
               <a:ext uri="{FF2B5EF4-FFF2-40B4-BE49-F238E27FC236}">
-                <a16:creationId xmlns:a16="http://schemas.microsoft.com/office/drawing/2014/main" id="{FB968CB3-1C25-C833-2D3B-6B1953851970}"/>
+                <a16:creationId xmlns:a16="http://schemas.microsoft.com/office/drawing/2014/main" id="{D32DD04E-1E44-C6AA-F148-7DDEC239BC0A}"/>
               </a:ext>
             </a:extLst>
           </p:cNvPr>
@@ -5514,7 +5508,7 @@
           <p:cNvPr id="4" name="テキスト ボックス 3">
             <a:extLst>
               <a:ext uri="{FF2B5EF4-FFF2-40B4-BE49-F238E27FC236}">
-                <a16:creationId xmlns:a16="http://schemas.microsoft.com/office/drawing/2014/main" id="{E990EEB0-A587-28AC-81F6-92079C5FAB5E}"/>
+                <a16:creationId xmlns:a16="http://schemas.microsoft.com/office/drawing/2014/main" id="{2D2F76F6-7146-7009-8A63-D7744B528B3A}"/>
               </a:ext>
             </a:extLst>
           </p:cNvPr>
@@ -5579,7 +5573,7 @@
           <p:cNvPr id="5" name="テキスト ボックス 4">
             <a:extLst>
               <a:ext uri="{FF2B5EF4-FFF2-40B4-BE49-F238E27FC236}">
-                <a16:creationId xmlns:a16="http://schemas.microsoft.com/office/drawing/2014/main" id="{7571E11D-11EB-D166-FC18-1D7090163C2B}"/>
+                <a16:creationId xmlns:a16="http://schemas.microsoft.com/office/drawing/2014/main" id="{67ABFDF9-8F94-9BBD-3756-D486B77BE5C9}"/>
               </a:ext>
             </a:extLst>
           </p:cNvPr>
@@ -5626,7 +5620,7 @@
             <a:hlinkClick r:id="" action="ppaction://media"/>
             <a:extLst>
               <a:ext uri="{FF2B5EF4-FFF2-40B4-BE49-F238E27FC236}">
-                <a16:creationId xmlns:a16="http://schemas.microsoft.com/office/drawing/2014/main" id="{54BC9E0A-2D3F-8A04-63B8-FB682D1E3024}"/>
+                <a16:creationId xmlns:a16="http://schemas.microsoft.com/office/drawing/2014/main" id="{6127E6F1-25A2-0D0F-7403-66EA41703069}"/>
               </a:ext>
             </a:extLst>
           </p:cNvPr>
@@ -5661,7 +5655,7 @@
     </p:spTree>
     <p:extLst>
       <p:ext uri="{BB962C8B-B14F-4D97-AF65-F5344CB8AC3E}">
-        <p14:creationId xmlns:p14="http://schemas.microsoft.com/office/powerpoint/2010/main" val="2979457937"/>
+        <p14:creationId xmlns:p14="http://schemas.microsoft.com/office/powerpoint/2010/main" val="847773128"/>
       </p:ext>
     </p:extLst>
   </p:cSld>
